--- a/slides/第11回_データベースとデータ処理.pptx
+++ b/slides/第11回_データベースとデータ処理.pptx
@@ -6318,45 +6318,6 @@
           </a:prstGeom>
         </p:spPr>
       </p:pic>
-      <p:sp>
-        <p:nvSpPr>
-          <p:cNvPr id="6" name="Text 3"/>
-          <p:cNvSpPr/>
-          <p:nvPr/>
-        </p:nvSpPr>
-        <p:spPr>
-          <a:xfrm>
-            <a:off x="685800" y="5687568"/>
-            <a:ext cx="10789920" cy="365760"/>
-          </a:xfrm>
-          <a:prstGeom prst="rect">
-            <a:avLst/>
-          </a:prstGeom>
-          <a:noFill/>
-          <a:ln/>
-        </p:spPr>
-        <p:txBody>
-          <a:bodyPr wrap="square" lIns="0" tIns="0" rIns="0" bIns="0" rtlCol="0" anchor="ctr"/>
-          <a:lstStyle/>
-          <a:p>
-            <a:pPr algn="ctr" indent="0" marL="0">
-              <a:buNone/>
-            </a:pPr>
-            <a:r>
-              <a:rPr lang="en-US" sz="1500" dirty="0">
-                <a:solidFill>
-                  <a:srgbClr val="16191D"/>
-                </a:solidFill>
-                <a:latin typeface="Yu Gothic" pitchFamily="34" charset="0"/>
-                <a:ea typeface="Yu Gothic" pitchFamily="34" charset="-122"/>
-                <a:cs typeface="Yu Gothic" pitchFamily="34" charset="-120"/>
-              </a:rPr>
-              <a:t>一致する相手がない行は、結果に現れない。</a:t>
-            </a:r>
-            <a:endParaRPr lang="en-US" sz="1500" dirty="0"/>
-          </a:p>
-        </p:txBody>
-      </p:sp>
     </p:spTree>
   </p:cSld>
   <p:clrMapOvr>
@@ -7064,7 +7025,7 @@
         <p:spPr>
           <a:xfrm>
             <a:off x="685800" y="1481328"/>
-            <a:ext cx="10789920" cy="621792"/>
+            <a:ext cx="10789920" cy="566928"/>
           </a:xfrm>
           <a:prstGeom prst="rect">
             <a:avLst/>
@@ -7112,7 +7073,7 @@
           </p:nvPr>
         </p:nvGraphicFramePr>
         <p:xfrm>
-          <a:off x="685800" y="2139696"/>
+          <a:off x="685800" y="2084832"/>
           <a:ext cx="10789920" cy="914400"/>
         </p:xfrm>
         <a:graphic>
@@ -7949,7 +7910,7 @@
         </p:nvSpPr>
         <p:spPr>
           <a:xfrm>
-            <a:off x="685800" y="4050792"/>
+            <a:off x="685800" y="3995928"/>
             <a:ext cx="10789920" cy="658368"/>
           </a:xfrm>
           <a:prstGeom prst="roundRect">
@@ -7976,7 +7937,7 @@
         </p:nvSpPr>
         <p:spPr>
           <a:xfrm>
-            <a:off x="914400" y="4197096"/>
+            <a:off x="914400" y="4142232"/>
             <a:ext cx="10332720" cy="365760"/>
           </a:xfrm>
           <a:prstGeom prst="rect">
@@ -8015,7 +7976,7 @@
         </p:nvSpPr>
         <p:spPr>
           <a:xfrm>
-            <a:off x="685800" y="4873752"/>
+            <a:off x="685800" y="4818888"/>
             <a:ext cx="10789920" cy="457200"/>
           </a:xfrm>
           <a:prstGeom prst="rect">
@@ -13847,7 +13808,7 @@
         <p:spPr>
           <a:xfrm>
             <a:off x="685800" y="1481328"/>
-            <a:ext cx="10789920" cy="621792"/>
+            <a:ext cx="10789920" cy="566928"/>
           </a:xfrm>
           <a:prstGeom prst="rect">
             <a:avLst/>
@@ -13896,8 +13857,8 @@
         </p:blipFill>
         <p:spPr>
           <a:xfrm>
-            <a:off x="3152394" y="2139696"/>
-            <a:ext cx="5856732" cy="3346704"/>
+            <a:off x="3104388" y="2084832"/>
+            <a:ext cx="5952744" cy="3401568"/>
           </a:xfrm>
           <a:prstGeom prst="rect">
             <a:avLst/>
@@ -14101,7 +14062,7 @@
         <p:spPr>
           <a:xfrm>
             <a:off x="685800" y="1481328"/>
-            <a:ext cx="10789920" cy="621792"/>
+            <a:ext cx="10789920" cy="365760"/>
           </a:xfrm>
           <a:prstGeom prst="rect">
             <a:avLst/>
@@ -14142,7 +14103,7 @@
         </p:nvSpPr>
         <p:spPr>
           <a:xfrm>
-            <a:off x="685800" y="2185416"/>
+            <a:off x="685800" y="1929384"/>
             <a:ext cx="10789920" cy="713232"/>
           </a:xfrm>
           <a:prstGeom prst="roundRect">
@@ -14169,7 +14130,7 @@
         </p:nvSpPr>
         <p:spPr>
           <a:xfrm>
-            <a:off x="914400" y="2340864"/>
+            <a:off x="914400" y="2084832"/>
             <a:ext cx="10332720" cy="402336"/>
           </a:xfrm>
           <a:prstGeom prst="rect">
@@ -14208,7 +14169,7 @@
         </p:nvSpPr>
         <p:spPr>
           <a:xfrm>
-            <a:off x="1188720" y="3145536"/>
+            <a:off x="1188720" y="2889504"/>
             <a:ext cx="4572000" cy="457200"/>
           </a:xfrm>
           <a:prstGeom prst="rect">
@@ -14247,7 +14208,7 @@
         </p:nvSpPr>
         <p:spPr>
           <a:xfrm>
-            <a:off x="5943600" y="3273552"/>
+            <a:off x="5943600" y="3017520"/>
             <a:ext cx="640080" cy="201168"/>
           </a:xfrm>
           <a:prstGeom prst="rightArrow">
@@ -14267,7 +14228,7 @@
         </p:nvSpPr>
         <p:spPr>
           <a:xfrm>
-            <a:off x="6766560" y="3145536"/>
+            <a:off x="6766560" y="2889504"/>
             <a:ext cx="4206240" cy="457200"/>
           </a:xfrm>
           <a:prstGeom prst="rect">
@@ -14306,7 +14267,7 @@
         </p:nvSpPr>
         <p:spPr>
           <a:xfrm>
-            <a:off x="1188720" y="3767328"/>
+            <a:off x="1188720" y="3511296"/>
             <a:ext cx="4572000" cy="457200"/>
           </a:xfrm>
           <a:prstGeom prst="rect">
@@ -14345,7 +14306,7 @@
         </p:nvSpPr>
         <p:spPr>
           <a:xfrm>
-            <a:off x="5943600" y="3895344"/>
+            <a:off x="5943600" y="3639312"/>
             <a:ext cx="640080" cy="201168"/>
           </a:xfrm>
           <a:prstGeom prst="rightArrow">
@@ -14365,7 +14326,7 @@
         </p:nvSpPr>
         <p:spPr>
           <a:xfrm>
-            <a:off x="6766560" y="3767328"/>
+            <a:off x="6766560" y="3511296"/>
             <a:ext cx="4206240" cy="457200"/>
           </a:xfrm>
           <a:prstGeom prst="rect">
@@ -14404,7 +14365,7 @@
         </p:nvSpPr>
         <p:spPr>
           <a:xfrm>
-            <a:off x="1188720" y="4389120"/>
+            <a:off x="1188720" y="4133088"/>
             <a:ext cx="4572000" cy="457200"/>
           </a:xfrm>
           <a:prstGeom prst="rect">
@@ -14443,7 +14404,7 @@
         </p:nvSpPr>
         <p:spPr>
           <a:xfrm>
-            <a:off x="5943600" y="4517136"/>
+            <a:off x="5943600" y="4261104"/>
             <a:ext cx="640080" cy="201168"/>
           </a:xfrm>
           <a:prstGeom prst="rightArrow">
@@ -14463,7 +14424,7 @@
         </p:nvSpPr>
         <p:spPr>
           <a:xfrm>
-            <a:off x="6766560" y="4389120"/>
+            <a:off x="6766560" y="4133088"/>
             <a:ext cx="4206240" cy="457200"/>
           </a:xfrm>
           <a:prstGeom prst="rect">
@@ -14502,7 +14463,7 @@
         </p:nvSpPr>
         <p:spPr>
           <a:xfrm>
-            <a:off x="685800" y="5102352"/>
+            <a:off x="685800" y="4846320"/>
             <a:ext cx="10789920" cy="457200"/>
           </a:xfrm>
           <a:prstGeom prst="rect">
@@ -21955,7 +21916,7 @@
         <p:spPr>
           <a:xfrm>
             <a:off x="685800" y="1481328"/>
-            <a:ext cx="10789920" cy="621792"/>
+            <a:ext cx="10789920" cy="365760"/>
           </a:xfrm>
           <a:prstGeom prst="rect">
             <a:avLst/>
@@ -22003,7 +21964,7 @@
           </p:nvPr>
         </p:nvGraphicFramePr>
         <p:xfrm>
-          <a:off x="685800" y="2139696"/>
+          <a:off x="685800" y="1883664"/>
           <a:ext cx="10789920" cy="914400"/>
         </p:xfrm>
         <a:graphic>
@@ -23263,7 +23224,7 @@
         </p:nvSpPr>
         <p:spPr>
           <a:xfrm>
-            <a:off x="685800" y="4562856"/>
+            <a:off x="685800" y="4306824"/>
             <a:ext cx="10789920" cy="658368"/>
           </a:xfrm>
           <a:prstGeom prst="roundRect">
@@ -23290,7 +23251,7 @@
         </p:nvSpPr>
         <p:spPr>
           <a:xfrm>
-            <a:off x="914400" y="4709160"/>
+            <a:off x="914400" y="4453128"/>
             <a:ext cx="10332720" cy="365760"/>
           </a:xfrm>
           <a:prstGeom prst="rect">
@@ -23329,7 +23290,7 @@
         </p:nvSpPr>
         <p:spPr>
           <a:xfrm>
-            <a:off x="685800" y="5385816"/>
+            <a:off x="685800" y="5129784"/>
             <a:ext cx="10789920" cy="457200"/>
           </a:xfrm>
           <a:prstGeom prst="rect">
@@ -23536,45 +23497,6 @@
           </a:prstGeom>
         </p:spPr>
       </p:pic>
-      <p:sp>
-        <p:nvSpPr>
-          <p:cNvPr id="6" name="Text 3"/>
-          <p:cNvSpPr/>
-          <p:nvPr/>
-        </p:nvSpPr>
-        <p:spPr>
-          <a:xfrm>
-            <a:off x="685800" y="5687568"/>
-            <a:ext cx="10789920" cy="365760"/>
-          </a:xfrm>
-          <a:prstGeom prst="rect">
-            <a:avLst/>
-          </a:prstGeom>
-          <a:noFill/>
-          <a:ln/>
-        </p:spPr>
-        <p:txBody>
-          <a:bodyPr wrap="square" lIns="0" tIns="0" rIns="0" bIns="0" rtlCol="0" anchor="ctr"/>
-          <a:lstStyle/>
-          <a:p>
-            <a:pPr algn="ctr" indent="0" marL="0">
-              <a:buNone/>
-            </a:pPr>
-            <a:r>
-              <a:rPr lang="en-US" sz="1500" dirty="0">
-                <a:solidFill>
-                  <a:srgbClr val="16191D"/>
-                </a:solidFill>
-                <a:latin typeface="Yu Gothic" pitchFamily="34" charset="0"/>
-                <a:ea typeface="Yu Gothic" pitchFamily="34" charset="-122"/>
-                <a:cs typeface="Yu Gothic" pitchFamily="34" charset="-120"/>
-              </a:rPr>
-              <a:t>1つの事実は、1箇所にだけ書く。こうすれば変更する場所も1箇所になり、矛盾が生じない。</a:t>
-            </a:r>
-            <a:endParaRPr lang="en-US" sz="1500" dirty="0"/>
-          </a:p>
-        </p:txBody>
-      </p:sp>
     </p:spTree>
   </p:cSld>
   <p:clrMapOvr>

--- a/slides/第11回_データベースとデータ処理.pptx
+++ b/slides/第11回_データベースとデータ処理.pptx
@@ -31,9 +31,11 @@
     <p:sldId id="279" r:id="rId25"/>
     <p:sldId id="280" r:id="rId26"/>
     <p:sldId id="281" r:id="rId27"/>
+    <p:sldId id="282" r:id="rId28"/>
+    <p:sldId id="283" r:id="rId29"/>
   </p:sldIdLst>
   <p:notesMasterIdLst>
-    <p:notesMasterId r:id="rId28"/>
+    <p:notesMasterId r:id="rId30"/>
   </p:notesMasterIdLst>
   <p:sldSz cx="12192000" cy="6858000"/>
   <p:notesSz cx="6858000" cy="12192000"/>
@@ -2135,6 +2137,182 @@
             <a:fld id="{F7021451-1387-4CA6-816F-3879F97B5CBC}" type="slidenum">
               <a:rPr lang="en-US"/>
               <a:t>26</a:t>
+            </a:fld>
+            <a:endParaRPr lang="en-US"/>
+          </a:p>
+        </p:txBody>
+      </p:sp>
+    </p:spTree>
+    <p:extLst>
+      <p:ext uri="{BB962C8B-B14F-4D97-AF65-F5344CB8AC3E}">
+        <p14:creationId xmlns:p14="http://schemas.microsoft.com/office/powerpoint/2010/main" val="1024086991"/>
+      </p:ext>
+    </p:extLst>
+  </p:cSld>
+  <p:clrMapOvr>
+    <a:masterClrMapping/>
+  </p:clrMapOvr>
+</p:notes>
+</file>
+
+<file path=ppt/notesSlides/notesSlide27.xml><?xml version="1.0" encoding="utf-8"?>
+<p:notes xmlns:a="http://schemas.openxmlformats.org/drawingml/2006/main" xmlns:r="http://schemas.openxmlformats.org/officeDocument/2006/relationships" xmlns:p="http://schemas.openxmlformats.org/presentationml/2006/main">
+  <p:cSld>
+    <p:spTree>
+      <p:nvGrpSpPr>
+        <p:cNvPr id="1" name=""/>
+        <p:cNvGrpSpPr/>
+        <p:nvPr/>
+      </p:nvGrpSpPr>
+      <p:grpSpPr>
+        <a:xfrm>
+          <a:off x="0" y="0"/>
+          <a:ext cx="0" cy="0"/>
+          <a:chOff x="0" y="0"/>
+          <a:chExt cx="0" cy="0"/>
+        </a:xfrm>
+      </p:grpSpPr>
+      <p:sp>
+        <p:nvSpPr>
+          <p:cNvPr id="2" name="Slide Image Placeholder 1"/>
+          <p:cNvSpPr>
+            <a:spLocks noGrp="1" noRot="1" noChangeAspect="1"/>
+          </p:cNvSpPr>
+          <p:nvPr>
+            <p:ph type="sldImg"/>
+          </p:nvPr>
+        </p:nvSpPr>
+        <p:spPr/>
+      </p:sp>
+      <p:sp>
+        <p:nvSpPr>
+          <p:cNvPr id="3" name="Notes Placeholder 2"/>
+          <p:cNvSpPr>
+            <a:spLocks noGrp="1"/>
+          </p:cNvSpPr>
+          <p:nvPr>
+            <p:ph type="body" idx="1"/>
+          </p:nvPr>
+        </p:nvSpPr>
+        <p:spPr/>
+        <p:txBody>
+          <a:bodyPr/>
+          <a:lstStyle/>
+          <a:p>
+            <a:r>
+              <a:rPr lang="en-US" dirty="0"/>
+              <a:t/>
+            </a:r>
+            <a:endParaRPr lang="en-US" dirty="0"/>
+          </a:p>
+        </p:txBody>
+      </p:sp>
+      <p:sp>
+        <p:nvSpPr>
+          <p:cNvPr id="4" name="Slide Number Placeholder 3"/>
+          <p:cNvSpPr>
+            <a:spLocks noGrp="1"/>
+          </p:cNvSpPr>
+          <p:nvPr>
+            <p:ph type="sldNum" sz="quarter" idx="10"/>
+          </p:nvPr>
+        </p:nvSpPr>
+        <p:spPr/>
+        <p:txBody>
+          <a:bodyPr/>
+          <a:lstStyle/>
+          <a:p>
+            <a:fld id="{F7021451-1387-4CA6-816F-3879F97B5CBC}" type="slidenum">
+              <a:rPr lang="en-US"/>
+              <a:t>27</a:t>
+            </a:fld>
+            <a:endParaRPr lang="en-US"/>
+          </a:p>
+        </p:txBody>
+      </p:sp>
+    </p:spTree>
+    <p:extLst>
+      <p:ext uri="{BB962C8B-B14F-4D97-AF65-F5344CB8AC3E}">
+        <p14:creationId xmlns:p14="http://schemas.microsoft.com/office/powerpoint/2010/main" val="1024086991"/>
+      </p:ext>
+    </p:extLst>
+  </p:cSld>
+  <p:clrMapOvr>
+    <a:masterClrMapping/>
+  </p:clrMapOvr>
+</p:notes>
+</file>
+
+<file path=ppt/notesSlides/notesSlide28.xml><?xml version="1.0" encoding="utf-8"?>
+<p:notes xmlns:a="http://schemas.openxmlformats.org/drawingml/2006/main" xmlns:r="http://schemas.openxmlformats.org/officeDocument/2006/relationships" xmlns:p="http://schemas.openxmlformats.org/presentationml/2006/main">
+  <p:cSld>
+    <p:spTree>
+      <p:nvGrpSpPr>
+        <p:cNvPr id="1" name=""/>
+        <p:cNvGrpSpPr/>
+        <p:nvPr/>
+      </p:nvGrpSpPr>
+      <p:grpSpPr>
+        <a:xfrm>
+          <a:off x="0" y="0"/>
+          <a:ext cx="0" cy="0"/>
+          <a:chOff x="0" y="0"/>
+          <a:chExt cx="0" cy="0"/>
+        </a:xfrm>
+      </p:grpSpPr>
+      <p:sp>
+        <p:nvSpPr>
+          <p:cNvPr id="2" name="Slide Image Placeholder 1"/>
+          <p:cNvSpPr>
+            <a:spLocks noGrp="1" noRot="1" noChangeAspect="1"/>
+          </p:cNvSpPr>
+          <p:nvPr>
+            <p:ph type="sldImg"/>
+          </p:nvPr>
+        </p:nvSpPr>
+        <p:spPr/>
+      </p:sp>
+      <p:sp>
+        <p:nvSpPr>
+          <p:cNvPr id="3" name="Notes Placeholder 2"/>
+          <p:cNvSpPr>
+            <a:spLocks noGrp="1"/>
+          </p:cNvSpPr>
+          <p:nvPr>
+            <p:ph type="body" idx="1"/>
+          </p:nvPr>
+        </p:nvSpPr>
+        <p:spPr/>
+        <p:txBody>
+          <a:bodyPr/>
+          <a:lstStyle/>
+          <a:p>
+            <a:r>
+              <a:rPr lang="en-US" dirty="0"/>
+              <a:t/>
+            </a:r>
+            <a:endParaRPr lang="en-US" dirty="0"/>
+          </a:p>
+        </p:txBody>
+      </p:sp>
+      <p:sp>
+        <p:nvSpPr>
+          <p:cNvPr id="4" name="Slide Number Placeholder 3"/>
+          <p:cNvSpPr>
+            <a:spLocks noGrp="1"/>
+          </p:cNvSpPr>
+          <p:nvPr>
+            <p:ph type="sldNum" sz="quarter" idx="10"/>
+          </p:nvPr>
+        </p:nvSpPr>
+        <p:spPr/>
+        <p:txBody>
+          <a:bodyPr/>
+          <a:lstStyle/>
+          <a:p>
+            <a:fld id="{F7021451-1387-4CA6-816F-3879F97B5CBC}" type="slidenum">
+              <a:rPr lang="en-US"/>
+              <a:t>28</a:t>
             </a:fld>
             <a:endParaRPr lang="en-US"/>
           </a:p>
@@ -15920,7 +16098,7 @@
                 <a:ea typeface="Yu Gothic" pitchFamily="34" charset="-122"/>
                 <a:cs typeface="Yu Gothic" pitchFamily="34" charset="-120"/>
               </a:rPr>
-              <a:t>11.5　大規模処理</a:t>
+              <a:t>11.5　ベクトル検索</a:t>
             </a:r>
             <a:endParaRPr lang="en-US" sz="1200" dirty="0"/>
           </a:p>
@@ -15959,7 +16137,7 @@
                 <a:ea typeface="Yu Gothic" pitchFamily="34" charset="-122"/>
                 <a:cs typeface="Yu Gothic" pitchFamily="34" charset="-120"/>
               </a:rPr>
-              <a:t>MapReduce の形が、この形である理由</a:t>
+              <a:t>「意味が近いか」で探す</a:t>
             </a:r>
             <a:endParaRPr lang="en-US" sz="3000" dirty="0"/>
           </a:p>
@@ -16006,18 +16184,60 @@
       </p:sp>
       <p:sp>
         <p:nvSpPr>
-          <p:cNvPr id="5" name="Shape 3"/>
-          <p:cNvSpPr/>
-          <p:nvPr/>
-        </p:nvSpPr>
-        <p:spPr>
-          <a:xfrm>
-            <a:off x="685800" y="1572768"/>
-            <a:ext cx="3474720" cy="1828800"/>
+          <p:cNvPr id="5" name="Text 3"/>
+          <p:cNvSpPr/>
+          <p:nvPr/>
+        </p:nvSpPr>
+        <p:spPr>
+          <a:xfrm>
+            <a:off x="685800" y="1481328"/>
+            <a:ext cx="10789920" cy="566928"/>
+          </a:xfrm>
+          <a:prstGeom prst="rect">
+            <a:avLst/>
+          </a:prstGeom>
+          <a:noFill/>
+          <a:ln/>
+        </p:spPr>
+        <p:txBody>
+          <a:bodyPr wrap="square" lIns="0" tIns="0" rIns="0" bIns="0" rtlCol="0" anchor="ctr"/>
+          <a:lstStyle/>
+          <a:p>
+            <a:pPr indent="0" marL="0">
+              <a:lnSpc>
+                <a:spcPts val="2200"/>
+              </a:lnSpc>
+              <a:buNone/>
+            </a:pPr>
+            <a:r>
+              <a:rPr lang="en-US" sz="1500" dirty="0">
+                <a:solidFill>
+                  <a:srgbClr val="16191D"/>
+                </a:solidFill>
+                <a:latin typeface="Yu Gothic" pitchFamily="34" charset="0"/>
+                <a:ea typeface="Yu Gothic" pitchFamily="34" charset="-122"/>
+                <a:cs typeface="Yu Gothic" pitchFamily="34" charset="-120"/>
+              </a:rPr>
+              <a:t>ここまでの検索は「値が一致するか」だった。しかし「この文書と似た内容の文書を探せ」は WHERE でも LIKE でも書けない。言い回しが違えば文字は一致しない。</a:t>
+            </a:r>
+            <a:endParaRPr lang="en-US" sz="1500" dirty="0"/>
+          </a:p>
+        </p:txBody>
+      </p:sp>
+      <p:sp>
+        <p:nvSpPr>
+          <p:cNvPr id="6" name="Shape 4"/>
+          <p:cNvSpPr/>
+          <p:nvPr/>
+        </p:nvSpPr>
+        <p:spPr>
+          <a:xfrm>
+            <a:off x="685800" y="2130552"/>
+            <a:ext cx="10789920" cy="713232"/>
           </a:xfrm>
           <a:prstGeom prst="roundRect">
             <a:avLst>
-              <a:gd name="adj" fmla="val 3000"/>
+              <a:gd name="adj" fmla="val 7692"/>
             </a:avLst>
           </a:prstGeom>
           <a:solidFill>
@@ -16033,14 +16253,14 @@
       </p:sp>
       <p:sp>
         <p:nvSpPr>
-          <p:cNvPr id="6" name="Text 4"/>
-          <p:cNvSpPr/>
-          <p:nvPr/>
-        </p:nvSpPr>
-        <p:spPr>
-          <a:xfrm>
-            <a:off x="832104" y="1700784"/>
-            <a:ext cx="365760" cy="256032"/>
+          <p:cNvPr id="7" name="Text 5"/>
+          <p:cNvSpPr/>
+          <p:nvPr/>
+        </p:nvSpPr>
+        <p:spPr>
+          <a:xfrm>
+            <a:off x="914400" y="2286000"/>
+            <a:ext cx="10332720" cy="402336"/>
           </a:xfrm>
           <a:prstGeom prst="rect">
             <a:avLst/>
@@ -16056,56 +16276,17 @@
               <a:buNone/>
             </a:pPr>
             <a:r>
-              <a:rPr lang="en-US" sz="1200" b="1" dirty="0">
+              <a:rPr lang="en-US" sz="1700" b="1" dirty="0">
                 <a:solidFill>
                   <a:srgbClr val="0B5CAD"/>
-                </a:solidFill>
-                <a:latin typeface="Courier New" pitchFamily="34" charset="0"/>
-                <a:ea typeface="Courier New" pitchFamily="34" charset="-122"/>
-                <a:cs typeface="Courier New" pitchFamily="34" charset="-120"/>
-              </a:rPr>
-              <a:t>1</a:t>
-            </a:r>
-            <a:endParaRPr lang="en-US" sz="1200" dirty="0"/>
-          </a:p>
-        </p:txBody>
-      </p:sp>
-      <p:sp>
-        <p:nvSpPr>
-          <p:cNvPr id="7" name="Text 5"/>
-          <p:cNvSpPr/>
-          <p:nvPr/>
-        </p:nvSpPr>
-        <p:spPr>
-          <a:xfrm>
-            <a:off x="832104" y="1993392"/>
-            <a:ext cx="3182112" cy="310896"/>
-          </a:xfrm>
-          <a:prstGeom prst="rect">
-            <a:avLst/>
-          </a:prstGeom>
-          <a:noFill/>
-          <a:ln/>
-        </p:spPr>
-        <p:txBody>
-          <a:bodyPr wrap="square" lIns="0" tIns="0" rIns="0" bIns="0" rtlCol="0" anchor="ctr"/>
-          <a:lstStyle/>
-          <a:p>
-            <a:pPr indent="0" marL="0">
-              <a:buNone/>
-            </a:pPr>
-            <a:r>
-              <a:rPr lang="en-US" sz="1400" b="1" dirty="0">
-                <a:solidFill>
-                  <a:srgbClr val="16191D"/>
                 </a:solidFill>
                 <a:latin typeface="Yu Gothic" pitchFamily="34" charset="0"/>
                 <a:ea typeface="Yu Gothic" pitchFamily="34" charset="-122"/>
                 <a:cs typeface="Yu Gothic" pitchFamily="34" charset="-120"/>
               </a:rPr>
-              <a:t>Map</a:t>
-            </a:r>
-            <a:endParaRPr lang="en-US" sz="1400" dirty="0"/>
+              <a:t>文章や画像を高次元のベクトルに変換し、もっとも近いベクトルを探す</a:t>
+            </a:r>
+            <a:endParaRPr lang="en-US" sz="1700" dirty="0"/>
           </a:p>
         </p:txBody>
       </p:sp>
@@ -16117,8 +16298,8 @@
         </p:nvSpPr>
         <p:spPr>
           <a:xfrm>
-            <a:off x="832104" y="2340864"/>
-            <a:ext cx="3182112" cy="1005840"/>
+            <a:off x="1188720" y="3090672"/>
+            <a:ext cx="4572000" cy="457200"/>
           </a:xfrm>
           <a:prstGeom prst="rect">
             <a:avLst/>
@@ -16127,27 +16308,24 @@
           <a:ln/>
         </p:spPr>
         <p:txBody>
-          <a:bodyPr wrap="square" lIns="0" tIns="0" rIns="0" bIns="0" rtlCol="0" anchor="t"/>
-          <a:lstStyle/>
-          <a:p>
-            <a:pPr indent="0" marL="0">
-              <a:lnSpc>
-                <a:spcPts val="1600"/>
-              </a:lnSpc>
-              <a:buNone/>
-            </a:pPr>
-            <a:r>
-              <a:rPr lang="en-US" sz="1200" dirty="0">
-                <a:solidFill>
-                  <a:srgbClr val="5F6672"/>
+          <a:bodyPr wrap="square" lIns="0" tIns="0" rIns="0" bIns="0" rtlCol="0" anchor="ctr"/>
+          <a:lstStyle/>
+          <a:p>
+            <a:pPr algn="r" indent="0" marL="0">
+              <a:buNone/>
+            </a:pPr>
+            <a:r>
+              <a:rPr lang="en-US" sz="1500" dirty="0">
+                <a:solidFill>
+                  <a:srgbClr val="16191D"/>
                 </a:solidFill>
                 <a:latin typeface="Yu Gothic" pitchFamily="34" charset="0"/>
                 <a:ea typeface="Yu Gothic" pitchFamily="34" charset="-122"/>
                 <a:cs typeface="Yu Gothic" pitchFamily="34" charset="-120"/>
               </a:rPr>
-              <a:t>データを分割し、各断片に同じ処理を並列に適用する。完全に独立なので台数に比例して速くなる</a:t>
-            </a:r>
-            <a:endParaRPr lang="en-US" sz="1200" dirty="0"/>
+              <a:t>従来の検索</a:t>
+            </a:r>
+            <a:endParaRPr lang="en-US" sz="1500" dirty="0"/>
           </a:p>
         </p:txBody>
       </p:sp>
@@ -16159,55 +16337,28 @@
         </p:nvSpPr>
         <p:spPr>
           <a:xfrm>
-            <a:off x="4178808" y="2267712"/>
-            <a:ext cx="146304" cy="146304"/>
+            <a:off x="5943600" y="3218688"/>
+            <a:ext cx="640080" cy="201168"/>
           </a:xfrm>
           <a:prstGeom prst="rightArrow">
             <a:avLst/>
           </a:prstGeom>
           <a:solidFill>
-            <a:srgbClr val="5F6672"/>
+            <a:srgbClr val="0B5CAD"/>
           </a:solidFill>
           <a:ln/>
         </p:spPr>
       </p:sp>
       <p:sp>
         <p:nvSpPr>
-          <p:cNvPr id="10" name="Shape 8"/>
-          <p:cNvSpPr/>
-          <p:nvPr/>
-        </p:nvSpPr>
-        <p:spPr>
-          <a:xfrm>
-            <a:off x="4343400" y="1572768"/>
-            <a:ext cx="3474720" cy="1828800"/>
-          </a:xfrm>
-          <a:prstGeom prst="roundRect">
-            <a:avLst>
-              <a:gd name="adj" fmla="val 3000"/>
-            </a:avLst>
-          </a:prstGeom>
-          <a:solidFill>
-            <a:srgbClr val="EEF1F5"/>
-          </a:solidFill>
-          <a:ln w="12700">
-            <a:solidFill>
-              <a:srgbClr val="DDE4EC"/>
-            </a:solidFill>
-            <a:prstDash val="solid"/>
-          </a:ln>
-        </p:spPr>
-      </p:sp>
-      <p:sp>
-        <p:nvSpPr>
-          <p:cNvPr id="11" name="Text 9"/>
-          <p:cNvSpPr/>
-          <p:nvPr/>
-        </p:nvSpPr>
-        <p:spPr>
-          <a:xfrm>
-            <a:off x="4489704" y="1700784"/>
-            <a:ext cx="365760" cy="256032"/>
+          <p:cNvPr id="10" name="Text 8"/>
+          <p:cNvSpPr/>
+          <p:nvPr/>
+        </p:nvSpPr>
+        <p:spPr>
+          <a:xfrm>
+            <a:off x="6766560" y="3090672"/>
+            <a:ext cx="4206240" cy="457200"/>
           </a:xfrm>
           <a:prstGeom prst="rect">
             <a:avLst/>
@@ -16223,69 +16374,30 @@
               <a:buNone/>
             </a:pPr>
             <a:r>
-              <a:rPr lang="en-US" sz="1200" b="1" dirty="0">
+              <a:rPr lang="en-US" sz="1600" b="1" dirty="0">
                 <a:solidFill>
                   <a:srgbClr val="0B5CAD"/>
-                </a:solidFill>
-                <a:latin typeface="Courier New" pitchFamily="34" charset="0"/>
-                <a:ea typeface="Courier New" pitchFamily="34" charset="-122"/>
-                <a:cs typeface="Courier New" pitchFamily="34" charset="-120"/>
-              </a:rPr>
-              <a:t>2</a:t>
-            </a:r>
-            <a:endParaRPr lang="en-US" sz="1200" dirty="0"/>
-          </a:p>
-        </p:txBody>
-      </p:sp>
-      <p:sp>
-        <p:nvSpPr>
-          <p:cNvPr id="12" name="Text 10"/>
-          <p:cNvSpPr/>
-          <p:nvPr/>
-        </p:nvSpPr>
-        <p:spPr>
-          <a:xfrm>
-            <a:off x="4489704" y="1993392"/>
-            <a:ext cx="3182112" cy="310896"/>
-          </a:xfrm>
-          <a:prstGeom prst="rect">
-            <a:avLst/>
-          </a:prstGeom>
-          <a:noFill/>
-          <a:ln/>
-        </p:spPr>
-        <p:txBody>
-          <a:bodyPr wrap="square" lIns="0" tIns="0" rIns="0" bIns="0" rtlCol="0" anchor="ctr"/>
-          <a:lstStyle/>
-          <a:p>
-            <a:pPr indent="0" marL="0">
-              <a:buNone/>
-            </a:pPr>
-            <a:r>
-              <a:rPr lang="en-US" sz="1400" b="1" dirty="0">
-                <a:solidFill>
-                  <a:srgbClr val="16191D"/>
                 </a:solidFill>
                 <a:latin typeface="Yu Gothic" pitchFamily="34" charset="0"/>
                 <a:ea typeface="Yu Gothic" pitchFamily="34" charset="-122"/>
                 <a:cs typeface="Yu Gothic" pitchFamily="34" charset="-120"/>
               </a:rPr>
-              <a:t>Shuffle</a:t>
-            </a:r>
-            <a:endParaRPr lang="en-US" sz="1400" dirty="0"/>
-          </a:p>
-        </p:txBody>
-      </p:sp>
-      <p:sp>
-        <p:nvSpPr>
-          <p:cNvPr id="13" name="Text 11"/>
-          <p:cNvSpPr/>
-          <p:nvPr/>
-        </p:nvSpPr>
-        <p:spPr>
-          <a:xfrm>
-            <a:off x="4489704" y="2340864"/>
-            <a:ext cx="3182112" cy="1005840"/>
+              <a:t>値が一致するか</a:t>
+            </a:r>
+            <a:endParaRPr lang="en-US" sz="1600" dirty="0"/>
+          </a:p>
+        </p:txBody>
+      </p:sp>
+      <p:sp>
+        <p:nvSpPr>
+          <p:cNvPr id="11" name="Text 9"/>
+          <p:cNvSpPr/>
+          <p:nvPr/>
+        </p:nvSpPr>
+        <p:spPr>
+          <a:xfrm>
+            <a:off x="1188720" y="3712464"/>
+            <a:ext cx="4572000" cy="457200"/>
           </a:xfrm>
           <a:prstGeom prst="rect">
             <a:avLst/>
@@ -16294,87 +16406,57 @@
           <a:ln/>
         </p:spPr>
         <p:txBody>
-          <a:bodyPr wrap="square" lIns="0" tIns="0" rIns="0" bIns="0" rtlCol="0" anchor="t"/>
-          <a:lstStyle/>
-          <a:p>
-            <a:pPr indent="0" marL="0">
-              <a:lnSpc>
-                <a:spcPts val="1600"/>
-              </a:lnSpc>
-              <a:buNone/>
-            </a:pPr>
-            <a:r>
-              <a:rPr lang="en-US" sz="1200" dirty="0">
-                <a:solidFill>
-                  <a:srgbClr val="5F6672"/>
+          <a:bodyPr wrap="square" lIns="0" tIns="0" rIns="0" bIns="0" rtlCol="0" anchor="ctr"/>
+          <a:lstStyle/>
+          <a:p>
+            <a:pPr algn="r" indent="0" marL="0">
+              <a:buNone/>
+            </a:pPr>
+            <a:r>
+              <a:rPr lang="en-US" sz="1500" dirty="0">
+                <a:solidFill>
+                  <a:srgbClr val="16191D"/>
                 </a:solidFill>
                 <a:latin typeface="Yu Gothic" pitchFamily="34" charset="0"/>
                 <a:ea typeface="Yu Gothic" pitchFamily="34" charset="-122"/>
                 <a:cs typeface="Yu Gothic" pitchFamily="34" charset="-120"/>
               </a:rPr>
-              <a:t>結果をキーごとにまとめ直す</a:t>
-            </a:r>
-            <a:endParaRPr lang="en-US" sz="1200" dirty="0"/>
-          </a:p>
-        </p:txBody>
-      </p:sp>
-      <p:sp>
-        <p:nvSpPr>
-          <p:cNvPr id="14" name="Shape 12"/>
-          <p:cNvSpPr/>
-          <p:nvPr/>
-        </p:nvSpPr>
-        <p:spPr>
-          <a:xfrm>
-            <a:off x="7836408" y="2267712"/>
-            <a:ext cx="146304" cy="146304"/>
+              <a:t>ベクトル検索</a:t>
+            </a:r>
+            <a:endParaRPr lang="en-US" sz="1500" dirty="0"/>
+          </a:p>
+        </p:txBody>
+      </p:sp>
+      <p:sp>
+        <p:nvSpPr>
+          <p:cNvPr id="12" name="Shape 10"/>
+          <p:cNvSpPr/>
+          <p:nvPr/>
+        </p:nvSpPr>
+        <p:spPr>
+          <a:xfrm>
+            <a:off x="5943600" y="3840480"/>
+            <a:ext cx="640080" cy="201168"/>
           </a:xfrm>
           <a:prstGeom prst="rightArrow">
             <a:avLst/>
           </a:prstGeom>
           <a:solidFill>
-            <a:srgbClr val="5F6672"/>
+            <a:srgbClr val="0B5CAD"/>
           </a:solidFill>
           <a:ln/>
         </p:spPr>
       </p:sp>
       <p:sp>
         <p:nvSpPr>
-          <p:cNvPr id="15" name="Shape 13"/>
-          <p:cNvSpPr/>
-          <p:nvPr/>
-        </p:nvSpPr>
-        <p:spPr>
-          <a:xfrm>
-            <a:off x="8001000" y="1572768"/>
-            <a:ext cx="3474720" cy="1828800"/>
-          </a:xfrm>
-          <a:prstGeom prst="roundRect">
-            <a:avLst>
-              <a:gd name="adj" fmla="val 3000"/>
-            </a:avLst>
-          </a:prstGeom>
-          <a:solidFill>
-            <a:srgbClr val="EEF1F5"/>
-          </a:solidFill>
-          <a:ln w="12700">
-            <a:solidFill>
-              <a:srgbClr val="DDE4EC"/>
-            </a:solidFill>
-            <a:prstDash val="solid"/>
-          </a:ln>
-        </p:spPr>
-      </p:sp>
-      <p:sp>
-        <p:nvSpPr>
-          <p:cNvPr id="16" name="Text 14"/>
-          <p:cNvSpPr/>
-          <p:nvPr/>
-        </p:nvSpPr>
-        <p:spPr>
-          <a:xfrm>
-            <a:off x="8147304" y="1700784"/>
-            <a:ext cx="365760" cy="256032"/>
+          <p:cNvPr id="13" name="Text 11"/>
+          <p:cNvSpPr/>
+          <p:nvPr/>
+        </p:nvSpPr>
+        <p:spPr>
+          <a:xfrm>
+            <a:off x="6766560" y="3712464"/>
+            <a:ext cx="4206240" cy="457200"/>
           </a:xfrm>
           <a:prstGeom prst="rect">
             <a:avLst/>
@@ -16390,110 +16472,29 @@
               <a:buNone/>
             </a:pPr>
             <a:r>
-              <a:rPr lang="en-US" sz="1200" b="1" dirty="0">
+              <a:rPr lang="en-US" sz="1600" b="1" dirty="0">
                 <a:solidFill>
                   <a:srgbClr val="0B5CAD"/>
-                </a:solidFill>
-                <a:latin typeface="Courier New" pitchFamily="34" charset="0"/>
-                <a:ea typeface="Courier New" pitchFamily="34" charset="-122"/>
-                <a:cs typeface="Courier New" pitchFamily="34" charset="-120"/>
-              </a:rPr>
-              <a:t>3</a:t>
-            </a:r>
-            <a:endParaRPr lang="en-US" sz="1200" dirty="0"/>
-          </a:p>
-        </p:txBody>
-      </p:sp>
-      <p:sp>
-        <p:nvSpPr>
-          <p:cNvPr id="17" name="Text 15"/>
-          <p:cNvSpPr/>
-          <p:nvPr/>
-        </p:nvSpPr>
-        <p:spPr>
-          <a:xfrm>
-            <a:off x="8147304" y="1993392"/>
-            <a:ext cx="3182112" cy="310896"/>
-          </a:xfrm>
-          <a:prstGeom prst="rect">
-            <a:avLst/>
-          </a:prstGeom>
-          <a:noFill/>
-          <a:ln/>
-        </p:spPr>
-        <p:txBody>
-          <a:bodyPr wrap="square" lIns="0" tIns="0" rIns="0" bIns="0" rtlCol="0" anchor="ctr"/>
-          <a:lstStyle/>
-          <a:p>
-            <a:pPr indent="0" marL="0">
-              <a:buNone/>
-            </a:pPr>
-            <a:r>
-              <a:rPr lang="en-US" sz="1400" b="1" dirty="0">
-                <a:solidFill>
-                  <a:srgbClr val="16191D"/>
                 </a:solidFill>
                 <a:latin typeface="Yu Gothic" pitchFamily="34" charset="0"/>
                 <a:ea typeface="Yu Gothic" pitchFamily="34" charset="-122"/>
                 <a:cs typeface="Yu Gothic" pitchFamily="34" charset="-120"/>
               </a:rPr>
-              <a:t>Reduce</a:t>
-            </a:r>
-            <a:endParaRPr lang="en-US" sz="1400" dirty="0"/>
-          </a:p>
-        </p:txBody>
-      </p:sp>
-      <p:sp>
-        <p:nvSpPr>
-          <p:cNvPr id="18" name="Text 16"/>
-          <p:cNvSpPr/>
-          <p:nvPr/>
-        </p:nvSpPr>
-        <p:spPr>
-          <a:xfrm>
-            <a:off x="8147304" y="2340864"/>
-            <a:ext cx="3182112" cy="1005840"/>
-          </a:xfrm>
-          <a:prstGeom prst="rect">
-            <a:avLst/>
-          </a:prstGeom>
-          <a:noFill/>
-          <a:ln/>
-        </p:spPr>
-        <p:txBody>
-          <a:bodyPr wrap="square" lIns="0" tIns="0" rIns="0" bIns="0" rtlCol="0" anchor="t"/>
-          <a:lstStyle/>
-          <a:p>
-            <a:pPr indent="0" marL="0">
-              <a:lnSpc>
-                <a:spcPts val="1600"/>
-              </a:lnSpc>
-              <a:buNone/>
-            </a:pPr>
-            <a:r>
-              <a:rPr lang="en-US" sz="1200" dirty="0">
-                <a:solidFill>
-                  <a:srgbClr val="5F6672"/>
-                </a:solidFill>
-                <a:latin typeface="Yu Gothic" pitchFamily="34" charset="0"/>
-                <a:ea typeface="Yu Gothic" pitchFamily="34" charset="-122"/>
-                <a:cs typeface="Yu Gothic" pitchFamily="34" charset="-120"/>
-              </a:rPr>
-              <a:t>キーごとに集約する</a:t>
-            </a:r>
-            <a:endParaRPr lang="en-US" sz="1200" dirty="0"/>
-          </a:p>
-        </p:txBody>
-      </p:sp>
-      <p:sp>
-        <p:nvSpPr>
-          <p:cNvPr id="19" name="Text 17"/>
-          <p:cNvSpPr/>
-          <p:nvPr/>
-        </p:nvSpPr>
-        <p:spPr>
-          <a:xfrm>
-            <a:off x="685800" y="3675888"/>
+              <a:t>意味が近いか</a:t>
+            </a:r>
+            <a:endParaRPr lang="en-US" sz="1600" dirty="0"/>
+          </a:p>
+        </p:txBody>
+      </p:sp>
+      <p:sp>
+        <p:nvSpPr>
+          <p:cNvPr id="14" name="Text 12"/>
+          <p:cNvSpPr/>
+          <p:nvPr/>
+        </p:nvSpPr>
+        <p:spPr>
+          <a:xfrm>
+            <a:off x="685800" y="4425696"/>
             <a:ext cx="10789920" cy="457200"/>
           </a:xfrm>
           <a:prstGeom prst="rect">
@@ -16521,7 +16522,7 @@
                 <a:ea typeface="Yu Gothic" pitchFamily="34" charset="-122"/>
                 <a:cs typeface="Yu Gothic" pitchFamily="34" charset="-120"/>
               </a:rPr>
-              <a:t>第5回のアムダールの法則を思い出す。並列化できる割合が上限を決める。Map の段階は完全に独立なので効率がよい。</a:t>
+              <a:t>学習済みモデルが「意味の近いものが近い位置に来る」ようにベクトル（埋め込み）を作る。検索は最近傍探索になる。</a:t>
             </a:r>
             <a:endParaRPr lang="en-US" sz="1300" dirty="0"/>
           </a:p>
@@ -16541,7 +16542,7 @@
                 <a:ea typeface="Yu Gothic" pitchFamily="34" charset="-122"/>
                 <a:cs typeface="Yu Gothic" pitchFamily="34" charset="-120"/>
               </a:rPr>
-              <a:t>また、どこか1台が壊れてもその断片だけやり直せばよい（耐障害性）。</a:t>
+              <a:t>B木は「大小の順序」で絞る構造だったが、ベクトルには自然な全順序がないので別の索引（HNSW などのグラフ）が要る。</a:t>
             </a:r>
             <a:endParaRPr lang="en-US" sz="1300" dirty="0"/>
           </a:p>
@@ -16549,7 +16550,7 @@
       </p:sp>
       <p:sp>
         <p:nvSpPr>
-          <p:cNvPr id="20" name="Text 18"/>
+          <p:cNvPr id="15" name="Text 13"/>
           <p:cNvSpPr/>
           <p:nvPr/>
         </p:nvSpPr>
@@ -16583,7 +16584,7 @@
                 <a:ea typeface="Yu Gothic" pitchFamily="34" charset="-122"/>
                 <a:cs typeface="Yu Gothic" pitchFamily="34" charset="-120"/>
               </a:rPr>
-              <a:t>現在は中間結果を主記憶に保持する Apache Spark のような枠組みが主流。第13回の機械学習は、この蓄積の上に成り立っている。</a:t>
+              <a:t>高次元では厳密な最近傍は全件走査に近づくので、近似最近傍探索を使う。第2回の「厳密解を諦めて近似に向かう」がここでも現れている。</a:t>
             </a:r>
             <a:endParaRPr lang="en-US" sz="1300" dirty="0"/>
           </a:p>
@@ -16654,7 +16655,7 @@
                 <a:ea typeface="Yu Gothic" pitchFamily="34" charset="-122"/>
                 <a:cs typeface="Yu Gothic" pitchFamily="34" charset="-120"/>
               </a:rPr>
-              <a:t>第11回</a:t>
+              <a:t>11.5　ベクトル検索</a:t>
             </a:r>
             <a:endParaRPr lang="en-US" sz="1200" dirty="0"/>
           </a:p>
@@ -16693,7 +16694,7 @@
                 <a:ea typeface="Yu Gothic" pitchFamily="34" charset="-122"/>
                 <a:cs typeface="Yu Gothic" pitchFamily="34" charset="-120"/>
               </a:rPr>
-              <a:t>演習</a:t>
+              <a:t>RAG は、この上に立っている</a:t>
             </a:r>
             <a:endParaRPr lang="en-US" sz="3000" dirty="0"/>
           </a:p>
@@ -16740,24 +16741,66 @@
       </p:sp>
       <p:sp>
         <p:nvSpPr>
-          <p:cNvPr id="5" name="Shape 3"/>
-          <p:cNvSpPr/>
-          <p:nvPr/>
-        </p:nvSpPr>
-        <p:spPr>
-          <a:xfrm>
-            <a:off x="685800" y="1691640"/>
-            <a:ext cx="868680" cy="402336"/>
+          <p:cNvPr id="5" name="Text 3"/>
+          <p:cNvSpPr/>
+          <p:nvPr/>
+        </p:nvSpPr>
+        <p:spPr>
+          <a:xfrm>
+            <a:off x="685800" y="1481328"/>
+            <a:ext cx="10789920" cy="365760"/>
+          </a:xfrm>
+          <a:prstGeom prst="rect">
+            <a:avLst/>
+          </a:prstGeom>
+          <a:noFill/>
+          <a:ln/>
+        </p:spPr>
+        <p:txBody>
+          <a:bodyPr wrap="square" lIns="0" tIns="0" rIns="0" bIns="0" rtlCol="0" anchor="ctr"/>
+          <a:lstStyle/>
+          <a:p>
+            <a:pPr indent="0" marL="0">
+              <a:lnSpc>
+                <a:spcPts val="2200"/>
+              </a:lnSpc>
+              <a:buNone/>
+            </a:pPr>
+            <a:r>
+              <a:rPr lang="en-US" sz="1500" dirty="0">
+                <a:solidFill>
+                  <a:srgbClr val="16191D"/>
+                </a:solidFill>
+                <a:latin typeface="Yu Gothic" pitchFamily="34" charset="0"/>
+                <a:ea typeface="Yu Gothic" pitchFamily="34" charset="-122"/>
+                <a:cs typeface="Yu Gothic" pitchFamily="34" charset="-120"/>
+              </a:rPr>
+              <a:t>第13回で扱う RAG（検索拡張生成）は、ベクトル検索とLLMの組み合わせである。</a:t>
+            </a:r>
+            <a:endParaRPr lang="en-US" sz="1500" dirty="0"/>
+          </a:p>
+        </p:txBody>
+      </p:sp>
+      <p:sp>
+        <p:nvSpPr>
+          <p:cNvPr id="6" name="Shape 4"/>
+          <p:cNvSpPr/>
+          <p:nvPr/>
+        </p:nvSpPr>
+        <p:spPr>
+          <a:xfrm>
+            <a:off x="685800" y="1975104"/>
+            <a:ext cx="3474720" cy="1463040"/>
           </a:xfrm>
           <a:prstGeom prst="roundRect">
             <a:avLst>
-              <a:gd name="adj" fmla="val 18182"/>
+              <a:gd name="adj" fmla="val 3750"/>
             </a:avLst>
           </a:prstGeom>
           <a:solidFill>
             <a:srgbClr val="D9E6F4"/>
           </a:solidFill>
-          <a:ln w="12700">
+          <a:ln w="19050">
             <a:solidFill>
               <a:srgbClr val="0B5CAD"/>
             </a:solidFill>
@@ -16767,14 +16810,14 @@
       </p:sp>
       <p:sp>
         <p:nvSpPr>
-          <p:cNvPr id="6" name="Text 4"/>
-          <p:cNvSpPr/>
-          <p:nvPr/>
-        </p:nvSpPr>
-        <p:spPr>
-          <a:xfrm>
-            <a:off x="685800" y="1691640"/>
-            <a:ext cx="868680" cy="402336"/>
+          <p:cNvPr id="7" name="Text 5"/>
+          <p:cNvSpPr/>
+          <p:nvPr/>
+        </p:nvSpPr>
+        <p:spPr>
+          <a:xfrm>
+            <a:off x="832104" y="2103120"/>
+            <a:ext cx="365760" cy="256032"/>
           </a:xfrm>
           <a:prstGeom prst="rect">
             <a:avLst/>
@@ -16786,11 +16829,11 @@
           <a:bodyPr wrap="square" lIns="0" tIns="0" rIns="0" bIns="0" rtlCol="0" anchor="ctr"/>
           <a:lstStyle/>
           <a:p>
-            <a:pPr algn="ctr" indent="0" marL="0">
-              <a:buNone/>
-            </a:pPr>
-            <a:r>
-              <a:rPr lang="en-US" sz="1300" b="1" dirty="0">
+            <a:pPr indent="0" marL="0">
+              <a:buNone/>
+            </a:pPr>
+            <a:r>
+              <a:rPr lang="en-US" sz="1200" b="1" dirty="0">
                 <a:solidFill>
                   <a:srgbClr val="0B5CAD"/>
                 </a:solidFill>
@@ -16798,22 +16841,22 @@
                 <a:ea typeface="Courier New" pitchFamily="34" charset="-122"/>
                 <a:cs typeface="Courier New" pitchFamily="34" charset="-120"/>
               </a:rPr>
-              <a:t>11-1</a:t>
-            </a:r>
-            <a:endParaRPr lang="en-US" sz="1300" dirty="0"/>
-          </a:p>
-        </p:txBody>
-      </p:sp>
-      <p:sp>
-        <p:nvSpPr>
-          <p:cNvPr id="7" name="Text 5"/>
-          <p:cNvSpPr/>
-          <p:nvPr/>
-        </p:nvSpPr>
-        <p:spPr>
-          <a:xfrm>
-            <a:off x="1783080" y="1673352"/>
-            <a:ext cx="9692640" cy="932688"/>
+              <a:t>1</a:t>
+            </a:r>
+            <a:endParaRPr lang="en-US" sz="1200" dirty="0"/>
+          </a:p>
+        </p:txBody>
+      </p:sp>
+      <p:sp>
+        <p:nvSpPr>
+          <p:cNvPr id="8" name="Text 6"/>
+          <p:cNvSpPr/>
+          <p:nvPr/>
+        </p:nvSpPr>
+        <p:spPr>
+          <a:xfrm>
+            <a:off x="832104" y="2395728"/>
+            <a:ext cx="3182112" cy="310896"/>
           </a:xfrm>
           <a:prstGeom prst="rect">
             <a:avLst/>
@@ -16822,17 +16865,14 @@
           <a:ln/>
         </p:spPr>
         <p:txBody>
-          <a:bodyPr wrap="square" lIns="0" tIns="0" rIns="0" bIns="0" rtlCol="0" anchor="t"/>
+          <a:bodyPr wrap="square" lIns="0" tIns="0" rIns="0" bIns="0" rtlCol="0" anchor="ctr"/>
           <a:lstStyle/>
           <a:p>
             <a:pPr indent="0" marL="0">
-              <a:lnSpc>
-                <a:spcPts val="2100"/>
-              </a:lnSpc>
-              <a:buNone/>
-            </a:pPr>
-            <a:r>
-              <a:rPr lang="en-US" sz="1400" dirty="0">
+              <a:buNone/>
+            </a:pPr>
+            <a:r>
+              <a:rPr lang="en-US" sz="1400" b="1" dirty="0">
                 <a:solidFill>
                   <a:srgbClr val="16191D"/>
                 </a:solidFill>
@@ -16840,7 +16880,7 @@
                 <a:ea typeface="Yu Gothic" pitchFamily="34" charset="-122"/>
                 <a:cs typeface="Yu Gothic" pitchFamily="34" charset="-120"/>
               </a:rPr>
-              <a:t>CSV ファイルで学生名簿を管理する場合の問題を4つ挙げ、それぞれ DBMS のどの機能が解決するか対応づけよ。</a:t>
+              <a:t>溜める</a:t>
             </a:r>
             <a:endParaRPr lang="en-US" sz="1400" dirty="0"/>
           </a:p>
@@ -16848,26 +16888,88 @@
       </p:sp>
       <p:sp>
         <p:nvSpPr>
-          <p:cNvPr id="8" name="Shape 6"/>
-          <p:cNvSpPr/>
-          <p:nvPr/>
-        </p:nvSpPr>
-        <p:spPr>
-          <a:xfrm>
-            <a:off x="685800" y="2770632"/>
-            <a:ext cx="868680" cy="402336"/>
+          <p:cNvPr id="9" name="Text 7"/>
+          <p:cNvSpPr/>
+          <p:nvPr/>
+        </p:nvSpPr>
+        <p:spPr>
+          <a:xfrm>
+            <a:off x="832104" y="2743200"/>
+            <a:ext cx="3182112" cy="640080"/>
+          </a:xfrm>
+          <a:prstGeom prst="rect">
+            <a:avLst/>
+          </a:prstGeom>
+          <a:noFill/>
+          <a:ln/>
+        </p:spPr>
+        <p:txBody>
+          <a:bodyPr wrap="square" lIns="0" tIns="0" rIns="0" bIns="0" rtlCol="0" anchor="t"/>
+          <a:lstStyle/>
+          <a:p>
+            <a:pPr indent="0" marL="0">
+              <a:lnSpc>
+                <a:spcPts val="1600"/>
+              </a:lnSpc>
+              <a:buNone/>
+            </a:pPr>
+            <a:r>
+              <a:rPr lang="en-US" sz="1200" dirty="0">
+                <a:solidFill>
+                  <a:srgbClr val="5F6672"/>
+                </a:solidFill>
+                <a:latin typeface="Yu Gothic" pitchFamily="34" charset="0"/>
+                <a:ea typeface="Yu Gothic" pitchFamily="34" charset="-122"/>
+                <a:cs typeface="Yu Gothic" pitchFamily="34" charset="-120"/>
+              </a:rPr>
+              <a:t>社内文書などを、あらかじめ全部ベクトルにして保存しておく</a:t>
+            </a:r>
+            <a:endParaRPr lang="en-US" sz="1200" dirty="0"/>
+          </a:p>
+        </p:txBody>
+      </p:sp>
+      <p:sp>
+        <p:nvSpPr>
+          <p:cNvPr id="10" name="Shape 8"/>
+          <p:cNvSpPr/>
+          <p:nvPr/>
+        </p:nvSpPr>
+        <p:spPr>
+          <a:xfrm>
+            <a:off x="4178808" y="2670048"/>
+            <a:ext cx="146304" cy="146304"/>
+          </a:xfrm>
+          <a:prstGeom prst="rightArrow">
+            <a:avLst/>
+          </a:prstGeom>
+          <a:solidFill>
+            <a:srgbClr val="5F6672"/>
+          </a:solidFill>
+          <a:ln/>
+        </p:spPr>
+      </p:sp>
+      <p:sp>
+        <p:nvSpPr>
+          <p:cNvPr id="11" name="Shape 9"/>
+          <p:cNvSpPr/>
+          <p:nvPr/>
+        </p:nvSpPr>
+        <p:spPr>
+          <a:xfrm>
+            <a:off x="4343400" y="1975104"/>
+            <a:ext cx="3474720" cy="1463040"/>
           </a:xfrm>
           <a:prstGeom prst="roundRect">
             <a:avLst>
-              <a:gd name="adj" fmla="val 18182"/>
+              <a:gd name="adj" fmla="val 3750"/>
             </a:avLst>
           </a:prstGeom>
           <a:solidFill>
-            <a:srgbClr val="D9E6F4"/>
+            <a:srgbClr val="EEF1F5"/>
           </a:solidFill>
           <a:ln w="12700">
             <a:solidFill>
-              <a:srgbClr val="0B5CAD"/>
+              <a:srgbClr val="DDE4EC"/>
             </a:solidFill>
             <a:prstDash val="solid"/>
           </a:ln>
@@ -16875,14 +16977,14 @@
       </p:sp>
       <p:sp>
         <p:nvSpPr>
-          <p:cNvPr id="9" name="Text 7"/>
-          <p:cNvSpPr/>
-          <p:nvPr/>
-        </p:nvSpPr>
-        <p:spPr>
-          <a:xfrm>
-            <a:off x="685800" y="2770632"/>
-            <a:ext cx="868680" cy="402336"/>
+          <p:cNvPr id="12" name="Text 10"/>
+          <p:cNvSpPr/>
+          <p:nvPr/>
+        </p:nvSpPr>
+        <p:spPr>
+          <a:xfrm>
+            <a:off x="4489704" y="2103120"/>
+            <a:ext cx="365760" cy="256032"/>
           </a:xfrm>
           <a:prstGeom prst="rect">
             <a:avLst/>
@@ -16894,11 +16996,11 @@
           <a:bodyPr wrap="square" lIns="0" tIns="0" rIns="0" bIns="0" rtlCol="0" anchor="ctr"/>
           <a:lstStyle/>
           <a:p>
-            <a:pPr algn="ctr" indent="0" marL="0">
-              <a:buNone/>
-            </a:pPr>
-            <a:r>
-              <a:rPr lang="en-US" sz="1300" b="1" dirty="0">
+            <a:pPr indent="0" marL="0">
+              <a:buNone/>
+            </a:pPr>
+            <a:r>
+              <a:rPr lang="en-US" sz="1200" b="1" dirty="0">
                 <a:solidFill>
                   <a:srgbClr val="0B5CAD"/>
                 </a:solidFill>
@@ -16906,22 +17008,22 @@
                 <a:ea typeface="Courier New" pitchFamily="34" charset="-122"/>
                 <a:cs typeface="Courier New" pitchFamily="34" charset="-120"/>
               </a:rPr>
-              <a:t>11-2</a:t>
-            </a:r>
-            <a:endParaRPr lang="en-US" sz="1300" dirty="0"/>
-          </a:p>
-        </p:txBody>
-      </p:sp>
-      <p:sp>
-        <p:nvSpPr>
-          <p:cNvPr id="10" name="Text 8"/>
-          <p:cNvSpPr/>
-          <p:nvPr/>
-        </p:nvSpPr>
-        <p:spPr>
-          <a:xfrm>
-            <a:off x="1783080" y="2752344"/>
-            <a:ext cx="9692640" cy="932688"/>
+              <a:t>2</a:t>
+            </a:r>
+            <a:endParaRPr lang="en-US" sz="1200" dirty="0"/>
+          </a:p>
+        </p:txBody>
+      </p:sp>
+      <p:sp>
+        <p:nvSpPr>
+          <p:cNvPr id="13" name="Text 11"/>
+          <p:cNvSpPr/>
+          <p:nvPr/>
+        </p:nvSpPr>
+        <p:spPr>
+          <a:xfrm>
+            <a:off x="4489704" y="2395728"/>
+            <a:ext cx="3182112" cy="310896"/>
           </a:xfrm>
           <a:prstGeom prst="rect">
             <a:avLst/>
@@ -16930,17 +17032,14 @@
           <a:ln/>
         </p:spPr>
         <p:txBody>
-          <a:bodyPr wrap="square" lIns="0" tIns="0" rIns="0" bIns="0" rtlCol="0" anchor="t"/>
+          <a:bodyPr wrap="square" lIns="0" tIns="0" rIns="0" bIns="0" rtlCol="0" anchor="ctr"/>
           <a:lstStyle/>
           <a:p>
             <a:pPr indent="0" marL="0">
-              <a:lnSpc>
-                <a:spcPts val="2100"/>
-              </a:lnSpc>
-              <a:buNone/>
-            </a:pPr>
-            <a:r>
-              <a:rPr lang="en-US" sz="1400" dirty="0">
+              <a:buNone/>
+            </a:pPr>
+            <a:r>
+              <a:rPr lang="en-US" sz="1400" b="1" dirty="0">
                 <a:solidFill>
                   <a:srgbClr val="16191D"/>
                 </a:solidFill>
@@ -16948,7 +17047,7 @@
                 <a:ea typeface="Yu Gothic" pitchFamily="34" charset="-122"/>
                 <a:cs typeface="Yu Gothic" pitchFamily="34" charset="-120"/>
               </a:rPr>
-              <a:t>「注文番号・顧客名・顧客住所・商品名・単価・数量」からなる表について、更新異常・挿入異常・削除異常の例をそれぞれ挙げ、正規化した設計を示せ。</a:t>
+              <a:t>探す</a:t>
             </a:r>
             <a:endParaRPr lang="en-US" sz="1400" dirty="0"/>
           </a:p>
@@ -16956,26 +17055,88 @@
       </p:sp>
       <p:sp>
         <p:nvSpPr>
-          <p:cNvPr id="11" name="Shape 9"/>
-          <p:cNvSpPr/>
-          <p:nvPr/>
-        </p:nvSpPr>
-        <p:spPr>
-          <a:xfrm>
-            <a:off x="685800" y="3849624"/>
-            <a:ext cx="868680" cy="402336"/>
+          <p:cNvPr id="14" name="Text 12"/>
+          <p:cNvSpPr/>
+          <p:nvPr/>
+        </p:nvSpPr>
+        <p:spPr>
+          <a:xfrm>
+            <a:off x="4489704" y="2743200"/>
+            <a:ext cx="3182112" cy="640080"/>
+          </a:xfrm>
+          <a:prstGeom prst="rect">
+            <a:avLst/>
+          </a:prstGeom>
+          <a:noFill/>
+          <a:ln/>
+        </p:spPr>
+        <p:txBody>
+          <a:bodyPr wrap="square" lIns="0" tIns="0" rIns="0" bIns="0" rtlCol="0" anchor="t"/>
+          <a:lstStyle/>
+          <a:p>
+            <a:pPr indent="0" marL="0">
+              <a:lnSpc>
+                <a:spcPts val="1600"/>
+              </a:lnSpc>
+              <a:buNone/>
+            </a:pPr>
+            <a:r>
+              <a:rPr lang="en-US" sz="1200" dirty="0">
+                <a:solidFill>
+                  <a:srgbClr val="5F6672"/>
+                </a:solidFill>
+                <a:latin typeface="Yu Gothic" pitchFamily="34" charset="0"/>
+                <a:ea typeface="Yu Gothic" pitchFamily="34" charset="-122"/>
+                <a:cs typeface="Yu Gothic" pitchFamily="34" charset="-120"/>
+              </a:rPr>
+              <a:t>質問もベクトルにして、近いベクトルの文書を取り出す</a:t>
+            </a:r>
+            <a:endParaRPr lang="en-US" sz="1200" dirty="0"/>
+          </a:p>
+        </p:txBody>
+      </p:sp>
+      <p:sp>
+        <p:nvSpPr>
+          <p:cNvPr id="15" name="Shape 13"/>
+          <p:cNvSpPr/>
+          <p:nvPr/>
+        </p:nvSpPr>
+        <p:spPr>
+          <a:xfrm>
+            <a:off x="7836408" y="2670048"/>
+            <a:ext cx="146304" cy="146304"/>
+          </a:xfrm>
+          <a:prstGeom prst="rightArrow">
+            <a:avLst/>
+          </a:prstGeom>
+          <a:solidFill>
+            <a:srgbClr val="5F6672"/>
+          </a:solidFill>
+          <a:ln/>
+        </p:spPr>
+      </p:sp>
+      <p:sp>
+        <p:nvSpPr>
+          <p:cNvPr id="16" name="Shape 14"/>
+          <p:cNvSpPr/>
+          <p:nvPr/>
+        </p:nvSpPr>
+        <p:spPr>
+          <a:xfrm>
+            <a:off x="8001000" y="1975104"/>
+            <a:ext cx="3474720" cy="1463040"/>
           </a:xfrm>
           <a:prstGeom prst="roundRect">
             <a:avLst>
-              <a:gd name="adj" fmla="val 18182"/>
+              <a:gd name="adj" fmla="val 3750"/>
             </a:avLst>
           </a:prstGeom>
           <a:solidFill>
-            <a:srgbClr val="D9E6F4"/>
+            <a:srgbClr val="EEF1F5"/>
           </a:solidFill>
           <a:ln w="12700">
             <a:solidFill>
-              <a:srgbClr val="0B5CAD"/>
+              <a:srgbClr val="DDE4EC"/>
             </a:solidFill>
             <a:prstDash val="solid"/>
           </a:ln>
@@ -16983,14 +17144,14 @@
       </p:sp>
       <p:sp>
         <p:nvSpPr>
-          <p:cNvPr id="12" name="Text 10"/>
-          <p:cNvSpPr/>
-          <p:nvPr/>
-        </p:nvSpPr>
-        <p:spPr>
-          <a:xfrm>
-            <a:off x="685800" y="3849624"/>
-            <a:ext cx="868680" cy="402336"/>
+          <p:cNvPr id="17" name="Text 15"/>
+          <p:cNvSpPr/>
+          <p:nvPr/>
+        </p:nvSpPr>
+        <p:spPr>
+          <a:xfrm>
+            <a:off x="8147304" y="2103120"/>
+            <a:ext cx="365760" cy="256032"/>
           </a:xfrm>
           <a:prstGeom prst="rect">
             <a:avLst/>
@@ -17002,11 +17163,11 @@
           <a:bodyPr wrap="square" lIns="0" tIns="0" rIns="0" bIns="0" rtlCol="0" anchor="ctr"/>
           <a:lstStyle/>
           <a:p>
-            <a:pPr algn="ctr" indent="0" marL="0">
-              <a:buNone/>
-            </a:pPr>
-            <a:r>
-              <a:rPr lang="en-US" sz="1300" b="1" dirty="0">
+            <a:pPr indent="0" marL="0">
+              <a:buNone/>
+            </a:pPr>
+            <a:r>
+              <a:rPr lang="en-US" sz="1200" b="1" dirty="0">
                 <a:solidFill>
                   <a:srgbClr val="0B5CAD"/>
                 </a:solidFill>
@@ -17014,22 +17175,22 @@
                 <a:ea typeface="Courier New" pitchFamily="34" charset="-122"/>
                 <a:cs typeface="Courier New" pitchFamily="34" charset="-120"/>
               </a:rPr>
-              <a:t>11-3</a:t>
-            </a:r>
-            <a:endParaRPr lang="en-US" sz="1300" dirty="0"/>
-          </a:p>
-        </p:txBody>
-      </p:sp>
-      <p:sp>
-        <p:nvSpPr>
-          <p:cNvPr id="13" name="Text 11"/>
-          <p:cNvSpPr/>
-          <p:nvPr/>
-        </p:nvSpPr>
-        <p:spPr>
-          <a:xfrm>
-            <a:off x="1783080" y="3831336"/>
-            <a:ext cx="9692640" cy="932688"/>
+              <a:t>3</a:t>
+            </a:r>
+            <a:endParaRPr lang="en-US" sz="1200" dirty="0"/>
+          </a:p>
+        </p:txBody>
+      </p:sp>
+      <p:sp>
+        <p:nvSpPr>
+          <p:cNvPr id="18" name="Text 16"/>
+          <p:cNvSpPr/>
+          <p:nvPr/>
+        </p:nvSpPr>
+        <p:spPr>
+          <a:xfrm>
+            <a:off x="8147304" y="2395728"/>
+            <a:ext cx="3182112" cy="310896"/>
           </a:xfrm>
           <a:prstGeom prst="rect">
             <a:avLst/>
@@ -17038,17 +17199,14 @@
           <a:ln/>
         </p:spPr>
         <p:txBody>
-          <a:bodyPr wrap="square" lIns="0" tIns="0" rIns="0" bIns="0" rtlCol="0" anchor="t"/>
+          <a:bodyPr wrap="square" lIns="0" tIns="0" rIns="0" bIns="0" rtlCol="0" anchor="ctr"/>
           <a:lstStyle/>
           <a:p>
             <a:pPr indent="0" marL="0">
-              <a:lnSpc>
-                <a:spcPts val="2100"/>
-              </a:lnSpc>
-              <a:buNone/>
-            </a:pPr>
-            <a:r>
-              <a:rPr lang="en-US" sz="1400" dirty="0">
+              <a:buNone/>
+            </a:pPr>
+            <a:r>
+              <a:rPr lang="en-US" sz="1400" b="1" dirty="0">
                 <a:solidFill>
                   <a:srgbClr val="16191D"/>
                 </a:solidFill>
@@ -17056,7 +17214,7 @@
                 <a:ea typeface="Yu Gothic" pitchFamily="34" charset="-122"/>
                 <a:cs typeface="Yu Gothic" pitchFamily="34" charset="-120"/>
               </a:rPr>
-              <a:t>WHERE と HAVING の違いを説明し、両方を使う SQL の例を1つ書け。</a:t>
+              <a:t>答えさせる</a:t>
             </a:r>
             <a:endParaRPr lang="en-US" sz="1400" dirty="0"/>
           </a:p>
@@ -17064,41 +17222,14 @@
       </p:sp>
       <p:sp>
         <p:nvSpPr>
-          <p:cNvPr id="14" name="Shape 12"/>
-          <p:cNvSpPr/>
-          <p:nvPr/>
-        </p:nvSpPr>
-        <p:spPr>
-          <a:xfrm>
-            <a:off x="685800" y="4928616"/>
-            <a:ext cx="868680" cy="402336"/>
-          </a:xfrm>
-          <a:prstGeom prst="roundRect">
-            <a:avLst>
-              <a:gd name="adj" fmla="val 18182"/>
-            </a:avLst>
-          </a:prstGeom>
-          <a:solidFill>
-            <a:srgbClr val="D9E6F4"/>
-          </a:solidFill>
-          <a:ln w="12700">
-            <a:solidFill>
-              <a:srgbClr val="0B5CAD"/>
-            </a:solidFill>
-            <a:prstDash val="solid"/>
-          </a:ln>
-        </p:spPr>
-      </p:sp>
-      <p:sp>
-        <p:nvSpPr>
-          <p:cNvPr id="15" name="Text 13"/>
-          <p:cNvSpPr/>
-          <p:nvPr/>
-        </p:nvSpPr>
-        <p:spPr>
-          <a:xfrm>
-            <a:off x="685800" y="4928616"/>
-            <a:ext cx="868680" cy="402336"/>
+          <p:cNvPr id="19" name="Text 17"/>
+          <p:cNvSpPr/>
+          <p:nvPr/>
+        </p:nvSpPr>
+        <p:spPr>
+          <a:xfrm>
+            <a:off x="8147304" y="2743200"/>
+            <a:ext cx="3182112" cy="640080"/>
           </a:xfrm>
           <a:prstGeom prst="rect">
             <a:avLst/>
@@ -17107,66 +17238,111 @@
           <a:ln/>
         </p:spPr>
         <p:txBody>
-          <a:bodyPr wrap="square" lIns="0" tIns="0" rIns="0" bIns="0" rtlCol="0" anchor="ctr"/>
-          <a:lstStyle/>
-          <a:p>
-            <a:pPr algn="ctr" indent="0" marL="0">
-              <a:buNone/>
-            </a:pPr>
-            <a:r>
-              <a:rPr lang="en-US" sz="1300" b="1" dirty="0">
-                <a:solidFill>
-                  <a:srgbClr val="0B5CAD"/>
-                </a:solidFill>
-                <a:latin typeface="Courier New" pitchFamily="34" charset="0"/>
-                <a:ea typeface="Courier New" pitchFamily="34" charset="-122"/>
-                <a:cs typeface="Courier New" pitchFamily="34" charset="-120"/>
-              </a:rPr>
-              <a:t>11-4</a:t>
-            </a:r>
-            <a:endParaRPr lang="en-US" sz="1300" dirty="0"/>
-          </a:p>
-        </p:txBody>
-      </p:sp>
-      <p:sp>
-        <p:nvSpPr>
-          <p:cNvPr id="16" name="Text 14"/>
-          <p:cNvSpPr/>
-          <p:nvPr/>
-        </p:nvSpPr>
-        <p:spPr>
-          <a:xfrm>
-            <a:off x="1783080" y="4910328"/>
-            <a:ext cx="9692640" cy="932688"/>
-          </a:xfrm>
-          <a:prstGeom prst="rect">
-            <a:avLst/>
-          </a:prstGeom>
-          <a:noFill/>
-          <a:ln/>
-        </p:spPr>
-        <p:txBody>
           <a:bodyPr wrap="square" lIns="0" tIns="0" rIns="0" bIns="0" rtlCol="0" anchor="t"/>
           <a:lstStyle/>
           <a:p>
             <a:pPr indent="0" marL="0">
               <a:lnSpc>
-                <a:spcPts val="2100"/>
+                <a:spcPts val="1600"/>
               </a:lnSpc>
               <a:buNone/>
             </a:pPr>
             <a:r>
-              <a:rPr lang="en-US" sz="1400" dirty="0">
-                <a:solidFill>
-                  <a:srgbClr val="16191D"/>
+              <a:rPr lang="en-US" sz="1200" dirty="0">
+                <a:solidFill>
+                  <a:srgbClr val="5F6672"/>
                 </a:solidFill>
                 <a:latin typeface="Yu Gothic" pitchFamily="34" charset="0"/>
                 <a:ea typeface="Yu Gothic" pitchFamily="34" charset="-122"/>
                 <a:cs typeface="Yu Gothic" pitchFamily="34" charset="-120"/>
               </a:rPr>
-              <a:t>CAP 定理において分断耐性を諦められないのはなぜか。また (a) 銀行の残高照会 (b) SNS の「いいね」の数 (c) 航空券の座席予約 は C と A のどちらを優先すべきか。</a:t>
-            </a:r>
-            <a:endParaRPr lang="en-US" sz="1400" dirty="0"/>
+              <a:t>その文書を文脈に入れて、LLM に答えさせる</a:t>
+            </a:r>
+            <a:endParaRPr lang="en-US" sz="1200" dirty="0"/>
+          </a:p>
+        </p:txBody>
+      </p:sp>
+      <p:sp>
+        <p:nvSpPr>
+          <p:cNvPr id="20" name="Text 18"/>
+          <p:cNvSpPr/>
+          <p:nvPr/>
+        </p:nvSpPr>
+        <p:spPr>
+          <a:xfrm>
+            <a:off x="685800" y="3712464"/>
+            <a:ext cx="10789920" cy="457200"/>
+          </a:xfrm>
+          <a:prstGeom prst="rect">
+            <a:avLst/>
+          </a:prstGeom>
+          <a:noFill/>
+          <a:ln/>
+        </p:spPr>
+        <p:txBody>
+          <a:bodyPr wrap="square" lIns="0" tIns="0" rIns="0" bIns="0" rtlCol="0" anchor="ctr"/>
+          <a:lstStyle/>
+          <a:p>
+            <a:pPr indent="0" marL="0">
+              <a:lnSpc>
+                <a:spcPts val="2000"/>
+              </a:lnSpc>
+              <a:buNone/>
+            </a:pPr>
+            <a:r>
+              <a:rPr lang="en-US" sz="1300" dirty="0">
+                <a:solidFill>
+                  <a:srgbClr val="5F6672"/>
+                </a:solidFill>
+                <a:latin typeface="Yu Gothic" pitchFamily="34" charset="0"/>
+                <a:ea typeface="Yu Gothic" pitchFamily="34" charset="-122"/>
+                <a:cs typeface="Yu Gothic" pitchFamily="34" charset="-120"/>
+              </a:rPr>
+              <a:t>モデルを学習し直さずに、最新のデータや社内の文書に基づいた回答をさせられる。これが実務で RAG が重視される理由である。</a:t>
+            </a:r>
+            <a:endParaRPr lang="en-US" sz="1300" dirty="0"/>
+          </a:p>
+        </p:txBody>
+      </p:sp>
+      <p:sp>
+        <p:nvSpPr>
+          <p:cNvPr id="21" name="Text 19"/>
+          <p:cNvSpPr/>
+          <p:nvPr/>
+        </p:nvSpPr>
+        <p:spPr>
+          <a:xfrm>
+            <a:off x="685800" y="5760720"/>
+            <a:ext cx="10789920" cy="512064"/>
+          </a:xfrm>
+          <a:prstGeom prst="rect">
+            <a:avLst/>
+          </a:prstGeom>
+          <a:noFill/>
+          <a:ln/>
+        </p:spPr>
+        <p:txBody>
+          <a:bodyPr wrap="square" lIns="0" tIns="0" rIns="0" bIns="0" rtlCol="0" anchor="ctr"/>
+          <a:lstStyle/>
+          <a:p>
+            <a:pPr indent="0" marL="0">
+              <a:lnSpc>
+                <a:spcPts val="1900"/>
+              </a:lnSpc>
+              <a:buNone/>
+            </a:pPr>
+            <a:r>
+              <a:rPr lang="en-US" sz="1300" b="1" dirty="0">
+                <a:solidFill>
+                  <a:srgbClr val="0B5CAD"/>
+                </a:solidFill>
+                <a:latin typeface="Yu Gothic" pitchFamily="34" charset="0"/>
+                <a:ea typeface="Yu Gothic" pitchFamily="34" charset="-122"/>
+                <a:cs typeface="Yu Gothic" pitchFamily="34" charset="-120"/>
+              </a:rPr>
+              <a:t>「データベースの話」が「生成AIの話」に直結する場所である。</a:t>
+            </a:r>
+            <a:endParaRPr lang="en-US" sz="1300" dirty="0"/>
           </a:p>
         </p:txBody>
       </p:sp>
@@ -17181,6 +17357,1429 @@
 <file path=ppt/slides/slide26.xml><?xml version="1.0" encoding="utf-8"?>
 <p:sld xmlns:a="http://schemas.openxmlformats.org/drawingml/2006/main" xmlns:r="http://schemas.openxmlformats.org/officeDocument/2006/relationships" xmlns:p="http://schemas.openxmlformats.org/presentationml/2006/main">
   <p:cSld name="Slide 26">
+    <p:bg>
+      <p:bgPr>
+        <a:solidFill>
+          <a:srgbClr val="FFFFFF"/>
+        </a:solidFill>
+      </p:bgPr>
+    </p:bg>
+    <p:spTree>
+      <p:nvGrpSpPr>
+        <p:cNvPr id="1" name=""/>
+        <p:cNvGrpSpPr/>
+        <p:nvPr/>
+      </p:nvGrpSpPr>
+      <p:grpSpPr>
+        <a:xfrm>
+          <a:off x="0" y="0"/>
+          <a:ext cx="0" cy="0"/>
+          <a:chOff x="0" y="0"/>
+          <a:chExt cx="0" cy="0"/>
+        </a:xfrm>
+      </p:grpSpPr>
+      <p:sp>
+        <p:nvSpPr>
+          <p:cNvPr id="2" name="Text 0"/>
+          <p:cNvSpPr/>
+          <p:nvPr/>
+        </p:nvSpPr>
+        <p:spPr>
+          <a:xfrm>
+            <a:off x="566928" y="310896"/>
+            <a:ext cx="4572000" cy="256032"/>
+          </a:xfrm>
+          <a:prstGeom prst="rect">
+            <a:avLst/>
+          </a:prstGeom>
+          <a:noFill/>
+          <a:ln/>
+        </p:spPr>
+        <p:txBody>
+          <a:bodyPr wrap="square" lIns="0" tIns="0" rIns="0" bIns="0" rtlCol="0" anchor="ctr"/>
+          <a:lstStyle/>
+          <a:p>
+            <a:pPr indent="0" marL="0">
+              <a:buNone/>
+            </a:pPr>
+            <a:r>
+              <a:rPr lang="en-US" sz="1200" b="1" dirty="0">
+                <a:solidFill>
+                  <a:srgbClr val="0B5CAD"/>
+                </a:solidFill>
+                <a:latin typeface="Yu Gothic" pitchFamily="34" charset="0"/>
+                <a:ea typeface="Yu Gothic" pitchFamily="34" charset="-122"/>
+                <a:cs typeface="Yu Gothic" pitchFamily="34" charset="-120"/>
+              </a:rPr>
+              <a:t>11.5　大規模処理</a:t>
+            </a:r>
+            <a:endParaRPr lang="en-US" sz="1200" dirty="0"/>
+          </a:p>
+        </p:txBody>
+      </p:sp>
+      <p:sp>
+        <p:nvSpPr>
+          <p:cNvPr id="3" name="Text 1"/>
+          <p:cNvSpPr/>
+          <p:nvPr/>
+        </p:nvSpPr>
+        <p:spPr>
+          <a:xfrm>
+            <a:off x="548640" y="603504"/>
+            <a:ext cx="11064240" cy="731520"/>
+          </a:xfrm>
+          <a:prstGeom prst="rect">
+            <a:avLst/>
+          </a:prstGeom>
+          <a:noFill/>
+          <a:ln/>
+        </p:spPr>
+        <p:txBody>
+          <a:bodyPr wrap="square" lIns="0" tIns="0" rIns="0" bIns="0" rtlCol="0" anchor="t"/>
+          <a:lstStyle/>
+          <a:p>
+            <a:pPr indent="0" marL="0">
+              <a:buNone/>
+            </a:pPr>
+            <a:r>
+              <a:rPr lang="en-US" sz="3000" b="1" dirty="0">
+                <a:solidFill>
+                  <a:srgbClr val="16191D"/>
+                </a:solidFill>
+                <a:latin typeface="Yu Gothic" pitchFamily="34" charset="0"/>
+                <a:ea typeface="Yu Gothic" pitchFamily="34" charset="-122"/>
+                <a:cs typeface="Yu Gothic" pitchFamily="34" charset="-120"/>
+              </a:rPr>
+              <a:t>MapReduce の形が、この形である理由</a:t>
+            </a:r>
+            <a:endParaRPr lang="en-US" sz="3000" dirty="0"/>
+          </a:p>
+        </p:txBody>
+      </p:sp>
+      <p:sp>
+        <p:nvSpPr>
+          <p:cNvPr id="4" name="Text 2"/>
+          <p:cNvSpPr/>
+          <p:nvPr/>
+        </p:nvSpPr>
+        <p:spPr>
+          <a:xfrm>
+            <a:off x="11247120" y="6355080"/>
+            <a:ext cx="548640" cy="274320"/>
+          </a:xfrm>
+          <a:prstGeom prst="rect">
+            <a:avLst/>
+          </a:prstGeom>
+          <a:noFill/>
+          <a:ln/>
+        </p:spPr>
+        <p:txBody>
+          <a:bodyPr wrap="square" lIns="0" tIns="0" rIns="0" bIns="0" rtlCol="0" anchor="ctr"/>
+          <a:lstStyle/>
+          <a:p>
+            <a:pPr algn="r" indent="0" marL="0">
+              <a:buNone/>
+            </a:pPr>
+            <a:r>
+              <a:rPr lang="en-US" sz="1000" dirty="0">
+                <a:solidFill>
+                  <a:srgbClr val="5F6672"/>
+                </a:solidFill>
+                <a:latin typeface="Yu Gothic" pitchFamily="34" charset="0"/>
+                <a:ea typeface="Yu Gothic" pitchFamily="34" charset="-122"/>
+                <a:cs typeface="Yu Gothic" pitchFamily="34" charset="-120"/>
+              </a:rPr>
+              <a:t>26</a:t>
+            </a:r>
+            <a:endParaRPr lang="en-US" sz="1000" dirty="0"/>
+          </a:p>
+        </p:txBody>
+      </p:sp>
+      <p:sp>
+        <p:nvSpPr>
+          <p:cNvPr id="5" name="Shape 3"/>
+          <p:cNvSpPr/>
+          <p:nvPr/>
+        </p:nvSpPr>
+        <p:spPr>
+          <a:xfrm>
+            <a:off x="685800" y="1572768"/>
+            <a:ext cx="3474720" cy="1828800"/>
+          </a:xfrm>
+          <a:prstGeom prst="roundRect">
+            <a:avLst>
+              <a:gd name="adj" fmla="val 3000"/>
+            </a:avLst>
+          </a:prstGeom>
+          <a:solidFill>
+            <a:srgbClr val="D9E6F4"/>
+          </a:solidFill>
+          <a:ln w="19050">
+            <a:solidFill>
+              <a:srgbClr val="0B5CAD"/>
+            </a:solidFill>
+            <a:prstDash val="solid"/>
+          </a:ln>
+        </p:spPr>
+      </p:sp>
+      <p:sp>
+        <p:nvSpPr>
+          <p:cNvPr id="6" name="Text 4"/>
+          <p:cNvSpPr/>
+          <p:nvPr/>
+        </p:nvSpPr>
+        <p:spPr>
+          <a:xfrm>
+            <a:off x="832104" y="1700784"/>
+            <a:ext cx="365760" cy="256032"/>
+          </a:xfrm>
+          <a:prstGeom prst="rect">
+            <a:avLst/>
+          </a:prstGeom>
+          <a:noFill/>
+          <a:ln/>
+        </p:spPr>
+        <p:txBody>
+          <a:bodyPr wrap="square" lIns="0" tIns="0" rIns="0" bIns="0" rtlCol="0" anchor="ctr"/>
+          <a:lstStyle/>
+          <a:p>
+            <a:pPr indent="0" marL="0">
+              <a:buNone/>
+            </a:pPr>
+            <a:r>
+              <a:rPr lang="en-US" sz="1200" b="1" dirty="0">
+                <a:solidFill>
+                  <a:srgbClr val="0B5CAD"/>
+                </a:solidFill>
+                <a:latin typeface="Courier New" pitchFamily="34" charset="0"/>
+                <a:ea typeface="Courier New" pitchFamily="34" charset="-122"/>
+                <a:cs typeface="Courier New" pitchFamily="34" charset="-120"/>
+              </a:rPr>
+              <a:t>1</a:t>
+            </a:r>
+            <a:endParaRPr lang="en-US" sz="1200" dirty="0"/>
+          </a:p>
+        </p:txBody>
+      </p:sp>
+      <p:sp>
+        <p:nvSpPr>
+          <p:cNvPr id="7" name="Text 5"/>
+          <p:cNvSpPr/>
+          <p:nvPr/>
+        </p:nvSpPr>
+        <p:spPr>
+          <a:xfrm>
+            <a:off x="832104" y="1993392"/>
+            <a:ext cx="3182112" cy="310896"/>
+          </a:xfrm>
+          <a:prstGeom prst="rect">
+            <a:avLst/>
+          </a:prstGeom>
+          <a:noFill/>
+          <a:ln/>
+        </p:spPr>
+        <p:txBody>
+          <a:bodyPr wrap="square" lIns="0" tIns="0" rIns="0" bIns="0" rtlCol="0" anchor="ctr"/>
+          <a:lstStyle/>
+          <a:p>
+            <a:pPr indent="0" marL="0">
+              <a:buNone/>
+            </a:pPr>
+            <a:r>
+              <a:rPr lang="en-US" sz="1400" b="1" dirty="0">
+                <a:solidFill>
+                  <a:srgbClr val="16191D"/>
+                </a:solidFill>
+                <a:latin typeface="Yu Gothic" pitchFamily="34" charset="0"/>
+                <a:ea typeface="Yu Gothic" pitchFamily="34" charset="-122"/>
+                <a:cs typeface="Yu Gothic" pitchFamily="34" charset="-120"/>
+              </a:rPr>
+              <a:t>Map</a:t>
+            </a:r>
+            <a:endParaRPr lang="en-US" sz="1400" dirty="0"/>
+          </a:p>
+        </p:txBody>
+      </p:sp>
+      <p:sp>
+        <p:nvSpPr>
+          <p:cNvPr id="8" name="Text 6"/>
+          <p:cNvSpPr/>
+          <p:nvPr/>
+        </p:nvSpPr>
+        <p:spPr>
+          <a:xfrm>
+            <a:off x="832104" y="2340864"/>
+            <a:ext cx="3182112" cy="1005840"/>
+          </a:xfrm>
+          <a:prstGeom prst="rect">
+            <a:avLst/>
+          </a:prstGeom>
+          <a:noFill/>
+          <a:ln/>
+        </p:spPr>
+        <p:txBody>
+          <a:bodyPr wrap="square" lIns="0" tIns="0" rIns="0" bIns="0" rtlCol="0" anchor="t"/>
+          <a:lstStyle/>
+          <a:p>
+            <a:pPr indent="0" marL="0">
+              <a:lnSpc>
+                <a:spcPts val="1600"/>
+              </a:lnSpc>
+              <a:buNone/>
+            </a:pPr>
+            <a:r>
+              <a:rPr lang="en-US" sz="1200" dirty="0">
+                <a:solidFill>
+                  <a:srgbClr val="5F6672"/>
+                </a:solidFill>
+                <a:latin typeface="Yu Gothic" pitchFamily="34" charset="0"/>
+                <a:ea typeface="Yu Gothic" pitchFamily="34" charset="-122"/>
+                <a:cs typeface="Yu Gothic" pitchFamily="34" charset="-120"/>
+              </a:rPr>
+              <a:t>データを分割し、各断片に同じ処理を並列に適用する。完全に独立なので台数に比例して速くなる</a:t>
+            </a:r>
+            <a:endParaRPr lang="en-US" sz="1200" dirty="0"/>
+          </a:p>
+        </p:txBody>
+      </p:sp>
+      <p:sp>
+        <p:nvSpPr>
+          <p:cNvPr id="9" name="Shape 7"/>
+          <p:cNvSpPr/>
+          <p:nvPr/>
+        </p:nvSpPr>
+        <p:spPr>
+          <a:xfrm>
+            <a:off x="4178808" y="2267712"/>
+            <a:ext cx="146304" cy="146304"/>
+          </a:xfrm>
+          <a:prstGeom prst="rightArrow">
+            <a:avLst/>
+          </a:prstGeom>
+          <a:solidFill>
+            <a:srgbClr val="5F6672"/>
+          </a:solidFill>
+          <a:ln/>
+        </p:spPr>
+      </p:sp>
+      <p:sp>
+        <p:nvSpPr>
+          <p:cNvPr id="10" name="Shape 8"/>
+          <p:cNvSpPr/>
+          <p:nvPr/>
+        </p:nvSpPr>
+        <p:spPr>
+          <a:xfrm>
+            <a:off x="4343400" y="1572768"/>
+            <a:ext cx="3474720" cy="1828800"/>
+          </a:xfrm>
+          <a:prstGeom prst="roundRect">
+            <a:avLst>
+              <a:gd name="adj" fmla="val 3000"/>
+            </a:avLst>
+          </a:prstGeom>
+          <a:solidFill>
+            <a:srgbClr val="EEF1F5"/>
+          </a:solidFill>
+          <a:ln w="12700">
+            <a:solidFill>
+              <a:srgbClr val="DDE4EC"/>
+            </a:solidFill>
+            <a:prstDash val="solid"/>
+          </a:ln>
+        </p:spPr>
+      </p:sp>
+      <p:sp>
+        <p:nvSpPr>
+          <p:cNvPr id="11" name="Text 9"/>
+          <p:cNvSpPr/>
+          <p:nvPr/>
+        </p:nvSpPr>
+        <p:spPr>
+          <a:xfrm>
+            <a:off x="4489704" y="1700784"/>
+            <a:ext cx="365760" cy="256032"/>
+          </a:xfrm>
+          <a:prstGeom prst="rect">
+            <a:avLst/>
+          </a:prstGeom>
+          <a:noFill/>
+          <a:ln/>
+        </p:spPr>
+        <p:txBody>
+          <a:bodyPr wrap="square" lIns="0" tIns="0" rIns="0" bIns="0" rtlCol="0" anchor="ctr"/>
+          <a:lstStyle/>
+          <a:p>
+            <a:pPr indent="0" marL="0">
+              <a:buNone/>
+            </a:pPr>
+            <a:r>
+              <a:rPr lang="en-US" sz="1200" b="1" dirty="0">
+                <a:solidFill>
+                  <a:srgbClr val="0B5CAD"/>
+                </a:solidFill>
+                <a:latin typeface="Courier New" pitchFamily="34" charset="0"/>
+                <a:ea typeface="Courier New" pitchFamily="34" charset="-122"/>
+                <a:cs typeface="Courier New" pitchFamily="34" charset="-120"/>
+              </a:rPr>
+              <a:t>2</a:t>
+            </a:r>
+            <a:endParaRPr lang="en-US" sz="1200" dirty="0"/>
+          </a:p>
+        </p:txBody>
+      </p:sp>
+      <p:sp>
+        <p:nvSpPr>
+          <p:cNvPr id="12" name="Text 10"/>
+          <p:cNvSpPr/>
+          <p:nvPr/>
+        </p:nvSpPr>
+        <p:spPr>
+          <a:xfrm>
+            <a:off x="4489704" y="1993392"/>
+            <a:ext cx="3182112" cy="310896"/>
+          </a:xfrm>
+          <a:prstGeom prst="rect">
+            <a:avLst/>
+          </a:prstGeom>
+          <a:noFill/>
+          <a:ln/>
+        </p:spPr>
+        <p:txBody>
+          <a:bodyPr wrap="square" lIns="0" tIns="0" rIns="0" bIns="0" rtlCol="0" anchor="ctr"/>
+          <a:lstStyle/>
+          <a:p>
+            <a:pPr indent="0" marL="0">
+              <a:buNone/>
+            </a:pPr>
+            <a:r>
+              <a:rPr lang="en-US" sz="1400" b="1" dirty="0">
+                <a:solidFill>
+                  <a:srgbClr val="16191D"/>
+                </a:solidFill>
+                <a:latin typeface="Yu Gothic" pitchFamily="34" charset="0"/>
+                <a:ea typeface="Yu Gothic" pitchFamily="34" charset="-122"/>
+                <a:cs typeface="Yu Gothic" pitchFamily="34" charset="-120"/>
+              </a:rPr>
+              <a:t>Shuffle</a:t>
+            </a:r>
+            <a:endParaRPr lang="en-US" sz="1400" dirty="0"/>
+          </a:p>
+        </p:txBody>
+      </p:sp>
+      <p:sp>
+        <p:nvSpPr>
+          <p:cNvPr id="13" name="Text 11"/>
+          <p:cNvSpPr/>
+          <p:nvPr/>
+        </p:nvSpPr>
+        <p:spPr>
+          <a:xfrm>
+            <a:off x="4489704" y="2340864"/>
+            <a:ext cx="3182112" cy="1005840"/>
+          </a:xfrm>
+          <a:prstGeom prst="rect">
+            <a:avLst/>
+          </a:prstGeom>
+          <a:noFill/>
+          <a:ln/>
+        </p:spPr>
+        <p:txBody>
+          <a:bodyPr wrap="square" lIns="0" tIns="0" rIns="0" bIns="0" rtlCol="0" anchor="t"/>
+          <a:lstStyle/>
+          <a:p>
+            <a:pPr indent="0" marL="0">
+              <a:lnSpc>
+                <a:spcPts val="1600"/>
+              </a:lnSpc>
+              <a:buNone/>
+            </a:pPr>
+            <a:r>
+              <a:rPr lang="en-US" sz="1200" dirty="0">
+                <a:solidFill>
+                  <a:srgbClr val="5F6672"/>
+                </a:solidFill>
+                <a:latin typeface="Yu Gothic" pitchFamily="34" charset="0"/>
+                <a:ea typeface="Yu Gothic" pitchFamily="34" charset="-122"/>
+                <a:cs typeface="Yu Gothic" pitchFamily="34" charset="-120"/>
+              </a:rPr>
+              <a:t>結果をキーごとにまとめ直す</a:t>
+            </a:r>
+            <a:endParaRPr lang="en-US" sz="1200" dirty="0"/>
+          </a:p>
+        </p:txBody>
+      </p:sp>
+      <p:sp>
+        <p:nvSpPr>
+          <p:cNvPr id="14" name="Shape 12"/>
+          <p:cNvSpPr/>
+          <p:nvPr/>
+        </p:nvSpPr>
+        <p:spPr>
+          <a:xfrm>
+            <a:off x="7836408" y="2267712"/>
+            <a:ext cx="146304" cy="146304"/>
+          </a:xfrm>
+          <a:prstGeom prst="rightArrow">
+            <a:avLst/>
+          </a:prstGeom>
+          <a:solidFill>
+            <a:srgbClr val="5F6672"/>
+          </a:solidFill>
+          <a:ln/>
+        </p:spPr>
+      </p:sp>
+      <p:sp>
+        <p:nvSpPr>
+          <p:cNvPr id="15" name="Shape 13"/>
+          <p:cNvSpPr/>
+          <p:nvPr/>
+        </p:nvSpPr>
+        <p:spPr>
+          <a:xfrm>
+            <a:off x="8001000" y="1572768"/>
+            <a:ext cx="3474720" cy="1828800"/>
+          </a:xfrm>
+          <a:prstGeom prst="roundRect">
+            <a:avLst>
+              <a:gd name="adj" fmla="val 3000"/>
+            </a:avLst>
+          </a:prstGeom>
+          <a:solidFill>
+            <a:srgbClr val="EEF1F5"/>
+          </a:solidFill>
+          <a:ln w="12700">
+            <a:solidFill>
+              <a:srgbClr val="DDE4EC"/>
+            </a:solidFill>
+            <a:prstDash val="solid"/>
+          </a:ln>
+        </p:spPr>
+      </p:sp>
+      <p:sp>
+        <p:nvSpPr>
+          <p:cNvPr id="16" name="Text 14"/>
+          <p:cNvSpPr/>
+          <p:nvPr/>
+        </p:nvSpPr>
+        <p:spPr>
+          <a:xfrm>
+            <a:off x="8147304" y="1700784"/>
+            <a:ext cx="365760" cy="256032"/>
+          </a:xfrm>
+          <a:prstGeom prst="rect">
+            <a:avLst/>
+          </a:prstGeom>
+          <a:noFill/>
+          <a:ln/>
+        </p:spPr>
+        <p:txBody>
+          <a:bodyPr wrap="square" lIns="0" tIns="0" rIns="0" bIns="0" rtlCol="0" anchor="ctr"/>
+          <a:lstStyle/>
+          <a:p>
+            <a:pPr indent="0" marL="0">
+              <a:buNone/>
+            </a:pPr>
+            <a:r>
+              <a:rPr lang="en-US" sz="1200" b="1" dirty="0">
+                <a:solidFill>
+                  <a:srgbClr val="0B5CAD"/>
+                </a:solidFill>
+                <a:latin typeface="Courier New" pitchFamily="34" charset="0"/>
+                <a:ea typeface="Courier New" pitchFamily="34" charset="-122"/>
+                <a:cs typeface="Courier New" pitchFamily="34" charset="-120"/>
+              </a:rPr>
+              <a:t>3</a:t>
+            </a:r>
+            <a:endParaRPr lang="en-US" sz="1200" dirty="0"/>
+          </a:p>
+        </p:txBody>
+      </p:sp>
+      <p:sp>
+        <p:nvSpPr>
+          <p:cNvPr id="17" name="Text 15"/>
+          <p:cNvSpPr/>
+          <p:nvPr/>
+        </p:nvSpPr>
+        <p:spPr>
+          <a:xfrm>
+            <a:off x="8147304" y="1993392"/>
+            <a:ext cx="3182112" cy="310896"/>
+          </a:xfrm>
+          <a:prstGeom prst="rect">
+            <a:avLst/>
+          </a:prstGeom>
+          <a:noFill/>
+          <a:ln/>
+        </p:spPr>
+        <p:txBody>
+          <a:bodyPr wrap="square" lIns="0" tIns="0" rIns="0" bIns="0" rtlCol="0" anchor="ctr"/>
+          <a:lstStyle/>
+          <a:p>
+            <a:pPr indent="0" marL="0">
+              <a:buNone/>
+            </a:pPr>
+            <a:r>
+              <a:rPr lang="en-US" sz="1400" b="1" dirty="0">
+                <a:solidFill>
+                  <a:srgbClr val="16191D"/>
+                </a:solidFill>
+                <a:latin typeface="Yu Gothic" pitchFamily="34" charset="0"/>
+                <a:ea typeface="Yu Gothic" pitchFamily="34" charset="-122"/>
+                <a:cs typeface="Yu Gothic" pitchFamily="34" charset="-120"/>
+              </a:rPr>
+              <a:t>Reduce</a:t>
+            </a:r>
+            <a:endParaRPr lang="en-US" sz="1400" dirty="0"/>
+          </a:p>
+        </p:txBody>
+      </p:sp>
+      <p:sp>
+        <p:nvSpPr>
+          <p:cNvPr id="18" name="Text 16"/>
+          <p:cNvSpPr/>
+          <p:nvPr/>
+        </p:nvSpPr>
+        <p:spPr>
+          <a:xfrm>
+            <a:off x="8147304" y="2340864"/>
+            <a:ext cx="3182112" cy="1005840"/>
+          </a:xfrm>
+          <a:prstGeom prst="rect">
+            <a:avLst/>
+          </a:prstGeom>
+          <a:noFill/>
+          <a:ln/>
+        </p:spPr>
+        <p:txBody>
+          <a:bodyPr wrap="square" lIns="0" tIns="0" rIns="0" bIns="0" rtlCol="0" anchor="t"/>
+          <a:lstStyle/>
+          <a:p>
+            <a:pPr indent="0" marL="0">
+              <a:lnSpc>
+                <a:spcPts val="1600"/>
+              </a:lnSpc>
+              <a:buNone/>
+            </a:pPr>
+            <a:r>
+              <a:rPr lang="en-US" sz="1200" dirty="0">
+                <a:solidFill>
+                  <a:srgbClr val="5F6672"/>
+                </a:solidFill>
+                <a:latin typeface="Yu Gothic" pitchFamily="34" charset="0"/>
+                <a:ea typeface="Yu Gothic" pitchFamily="34" charset="-122"/>
+                <a:cs typeface="Yu Gothic" pitchFamily="34" charset="-120"/>
+              </a:rPr>
+              <a:t>キーごとに集約する</a:t>
+            </a:r>
+            <a:endParaRPr lang="en-US" sz="1200" dirty="0"/>
+          </a:p>
+        </p:txBody>
+      </p:sp>
+      <p:sp>
+        <p:nvSpPr>
+          <p:cNvPr id="19" name="Text 17"/>
+          <p:cNvSpPr/>
+          <p:nvPr/>
+        </p:nvSpPr>
+        <p:spPr>
+          <a:xfrm>
+            <a:off x="685800" y="3675888"/>
+            <a:ext cx="10789920" cy="457200"/>
+          </a:xfrm>
+          <a:prstGeom prst="rect">
+            <a:avLst/>
+          </a:prstGeom>
+          <a:noFill/>
+          <a:ln/>
+        </p:spPr>
+        <p:txBody>
+          <a:bodyPr wrap="square" lIns="0" tIns="0" rIns="0" bIns="0" rtlCol="0" anchor="ctr"/>
+          <a:lstStyle/>
+          <a:p>
+            <a:pPr indent="0" marL="0">
+              <a:lnSpc>
+                <a:spcPts val="2000"/>
+              </a:lnSpc>
+              <a:buNone/>
+            </a:pPr>
+            <a:r>
+              <a:rPr lang="en-US" sz="1300" dirty="0">
+                <a:solidFill>
+                  <a:srgbClr val="5F6672"/>
+                </a:solidFill>
+                <a:latin typeface="Yu Gothic" pitchFamily="34" charset="0"/>
+                <a:ea typeface="Yu Gothic" pitchFamily="34" charset="-122"/>
+                <a:cs typeface="Yu Gothic" pitchFamily="34" charset="-120"/>
+              </a:rPr>
+              <a:t>第5回のアムダールの法則を思い出す。並列化できる割合が上限を決める。Map の段階は完全に独立なので効率がよい。</a:t>
+            </a:r>
+            <a:endParaRPr lang="en-US" sz="1300" dirty="0"/>
+          </a:p>
+          <a:p>
+            <a:pPr indent="0" marL="0">
+              <a:lnSpc>
+                <a:spcPts val="2000"/>
+              </a:lnSpc>
+              <a:buNone/>
+            </a:pPr>
+            <a:r>
+              <a:rPr lang="en-US" sz="1300" dirty="0">
+                <a:solidFill>
+                  <a:srgbClr val="5F6672"/>
+                </a:solidFill>
+                <a:latin typeface="Yu Gothic" pitchFamily="34" charset="0"/>
+                <a:ea typeface="Yu Gothic" pitchFamily="34" charset="-122"/>
+                <a:cs typeface="Yu Gothic" pitchFamily="34" charset="-120"/>
+              </a:rPr>
+              <a:t>また、どこか1台が壊れてもその断片だけやり直せばよい（耐障害性）。</a:t>
+            </a:r>
+            <a:endParaRPr lang="en-US" sz="1300" dirty="0"/>
+          </a:p>
+        </p:txBody>
+      </p:sp>
+      <p:sp>
+        <p:nvSpPr>
+          <p:cNvPr id="20" name="Text 18"/>
+          <p:cNvSpPr/>
+          <p:nvPr/>
+        </p:nvSpPr>
+        <p:spPr>
+          <a:xfrm>
+            <a:off x="685800" y="5852160"/>
+            <a:ext cx="10789920" cy="512064"/>
+          </a:xfrm>
+          <a:prstGeom prst="rect">
+            <a:avLst/>
+          </a:prstGeom>
+          <a:noFill/>
+          <a:ln/>
+        </p:spPr>
+        <p:txBody>
+          <a:bodyPr wrap="square" lIns="0" tIns="0" rIns="0" bIns="0" rtlCol="0" anchor="ctr"/>
+          <a:lstStyle/>
+          <a:p>
+            <a:pPr indent="0" marL="0">
+              <a:lnSpc>
+                <a:spcPts val="1900"/>
+              </a:lnSpc>
+              <a:buNone/>
+            </a:pPr>
+            <a:r>
+              <a:rPr lang="en-US" sz="1300" b="1" dirty="0">
+                <a:solidFill>
+                  <a:srgbClr val="0B5CAD"/>
+                </a:solidFill>
+                <a:latin typeface="Yu Gothic" pitchFamily="34" charset="0"/>
+                <a:ea typeface="Yu Gothic" pitchFamily="34" charset="-122"/>
+                <a:cs typeface="Yu Gothic" pitchFamily="34" charset="-120"/>
+              </a:rPr>
+              <a:t>現在は中間結果を主記憶に保持する Apache Spark のような枠組みが主流。第13回の機械学習は、この蓄積の上に成り立っている。</a:t>
+            </a:r>
+            <a:endParaRPr lang="en-US" sz="1300" dirty="0"/>
+          </a:p>
+        </p:txBody>
+      </p:sp>
+    </p:spTree>
+  </p:cSld>
+  <p:clrMapOvr>
+    <a:masterClrMapping/>
+  </p:clrMapOvr>
+</p:sld>
+</file>
+
+<file path=ppt/slides/slide27.xml><?xml version="1.0" encoding="utf-8"?>
+<p:sld xmlns:a="http://schemas.openxmlformats.org/drawingml/2006/main" xmlns:r="http://schemas.openxmlformats.org/officeDocument/2006/relationships" xmlns:p="http://schemas.openxmlformats.org/presentationml/2006/main">
+  <p:cSld name="Slide 27">
+    <p:bg>
+      <p:bgPr>
+        <a:solidFill>
+          <a:srgbClr val="FFFFFF"/>
+        </a:solidFill>
+      </p:bgPr>
+    </p:bg>
+    <p:spTree>
+      <p:nvGrpSpPr>
+        <p:cNvPr id="1" name=""/>
+        <p:cNvGrpSpPr/>
+        <p:nvPr/>
+      </p:nvGrpSpPr>
+      <p:grpSpPr>
+        <a:xfrm>
+          <a:off x="0" y="0"/>
+          <a:ext cx="0" cy="0"/>
+          <a:chOff x="0" y="0"/>
+          <a:chExt cx="0" cy="0"/>
+        </a:xfrm>
+      </p:grpSpPr>
+      <p:sp>
+        <p:nvSpPr>
+          <p:cNvPr id="2" name="Text 0"/>
+          <p:cNvSpPr/>
+          <p:nvPr/>
+        </p:nvSpPr>
+        <p:spPr>
+          <a:xfrm>
+            <a:off x="566928" y="310896"/>
+            <a:ext cx="4572000" cy="256032"/>
+          </a:xfrm>
+          <a:prstGeom prst="rect">
+            <a:avLst/>
+          </a:prstGeom>
+          <a:noFill/>
+          <a:ln/>
+        </p:spPr>
+        <p:txBody>
+          <a:bodyPr wrap="square" lIns="0" tIns="0" rIns="0" bIns="0" rtlCol="0" anchor="ctr"/>
+          <a:lstStyle/>
+          <a:p>
+            <a:pPr indent="0" marL="0">
+              <a:buNone/>
+            </a:pPr>
+            <a:r>
+              <a:rPr lang="en-US" sz="1200" b="1" dirty="0">
+                <a:solidFill>
+                  <a:srgbClr val="0B5CAD"/>
+                </a:solidFill>
+                <a:latin typeface="Yu Gothic" pitchFamily="34" charset="0"/>
+                <a:ea typeface="Yu Gothic" pitchFamily="34" charset="-122"/>
+                <a:cs typeface="Yu Gothic" pitchFamily="34" charset="-120"/>
+              </a:rPr>
+              <a:t>第11回</a:t>
+            </a:r>
+            <a:endParaRPr lang="en-US" sz="1200" dirty="0"/>
+          </a:p>
+        </p:txBody>
+      </p:sp>
+      <p:sp>
+        <p:nvSpPr>
+          <p:cNvPr id="3" name="Text 1"/>
+          <p:cNvSpPr/>
+          <p:nvPr/>
+        </p:nvSpPr>
+        <p:spPr>
+          <a:xfrm>
+            <a:off x="548640" y="603504"/>
+            <a:ext cx="11064240" cy="731520"/>
+          </a:xfrm>
+          <a:prstGeom prst="rect">
+            <a:avLst/>
+          </a:prstGeom>
+          <a:noFill/>
+          <a:ln/>
+        </p:spPr>
+        <p:txBody>
+          <a:bodyPr wrap="square" lIns="0" tIns="0" rIns="0" bIns="0" rtlCol="0" anchor="t"/>
+          <a:lstStyle/>
+          <a:p>
+            <a:pPr indent="0" marL="0">
+              <a:buNone/>
+            </a:pPr>
+            <a:r>
+              <a:rPr lang="en-US" sz="3000" b="1" dirty="0">
+                <a:solidFill>
+                  <a:srgbClr val="16191D"/>
+                </a:solidFill>
+                <a:latin typeface="Yu Gothic" pitchFamily="34" charset="0"/>
+                <a:ea typeface="Yu Gothic" pitchFamily="34" charset="-122"/>
+                <a:cs typeface="Yu Gothic" pitchFamily="34" charset="-120"/>
+              </a:rPr>
+              <a:t>演習</a:t>
+            </a:r>
+            <a:endParaRPr lang="en-US" sz="3000" dirty="0"/>
+          </a:p>
+        </p:txBody>
+      </p:sp>
+      <p:sp>
+        <p:nvSpPr>
+          <p:cNvPr id="4" name="Text 2"/>
+          <p:cNvSpPr/>
+          <p:nvPr/>
+        </p:nvSpPr>
+        <p:spPr>
+          <a:xfrm>
+            <a:off x="11247120" y="6355080"/>
+            <a:ext cx="548640" cy="274320"/>
+          </a:xfrm>
+          <a:prstGeom prst="rect">
+            <a:avLst/>
+          </a:prstGeom>
+          <a:noFill/>
+          <a:ln/>
+        </p:spPr>
+        <p:txBody>
+          <a:bodyPr wrap="square" lIns="0" tIns="0" rIns="0" bIns="0" rtlCol="0" anchor="ctr"/>
+          <a:lstStyle/>
+          <a:p>
+            <a:pPr algn="r" indent="0" marL="0">
+              <a:buNone/>
+            </a:pPr>
+            <a:r>
+              <a:rPr lang="en-US" sz="1000" dirty="0">
+                <a:solidFill>
+                  <a:srgbClr val="5F6672"/>
+                </a:solidFill>
+                <a:latin typeface="Yu Gothic" pitchFamily="34" charset="0"/>
+                <a:ea typeface="Yu Gothic" pitchFamily="34" charset="-122"/>
+                <a:cs typeface="Yu Gothic" pitchFamily="34" charset="-120"/>
+              </a:rPr>
+              <a:t>27</a:t>
+            </a:r>
+            <a:endParaRPr lang="en-US" sz="1000" dirty="0"/>
+          </a:p>
+        </p:txBody>
+      </p:sp>
+      <p:sp>
+        <p:nvSpPr>
+          <p:cNvPr id="5" name="Shape 3"/>
+          <p:cNvSpPr/>
+          <p:nvPr/>
+        </p:nvSpPr>
+        <p:spPr>
+          <a:xfrm>
+            <a:off x="685800" y="1691640"/>
+            <a:ext cx="868680" cy="402336"/>
+          </a:xfrm>
+          <a:prstGeom prst="roundRect">
+            <a:avLst>
+              <a:gd name="adj" fmla="val 18182"/>
+            </a:avLst>
+          </a:prstGeom>
+          <a:solidFill>
+            <a:srgbClr val="D9E6F4"/>
+          </a:solidFill>
+          <a:ln w="12700">
+            <a:solidFill>
+              <a:srgbClr val="0B5CAD"/>
+            </a:solidFill>
+            <a:prstDash val="solid"/>
+          </a:ln>
+        </p:spPr>
+      </p:sp>
+      <p:sp>
+        <p:nvSpPr>
+          <p:cNvPr id="6" name="Text 4"/>
+          <p:cNvSpPr/>
+          <p:nvPr/>
+        </p:nvSpPr>
+        <p:spPr>
+          <a:xfrm>
+            <a:off x="685800" y="1691640"/>
+            <a:ext cx="868680" cy="402336"/>
+          </a:xfrm>
+          <a:prstGeom prst="rect">
+            <a:avLst/>
+          </a:prstGeom>
+          <a:noFill/>
+          <a:ln/>
+        </p:spPr>
+        <p:txBody>
+          <a:bodyPr wrap="square" lIns="0" tIns="0" rIns="0" bIns="0" rtlCol="0" anchor="ctr"/>
+          <a:lstStyle/>
+          <a:p>
+            <a:pPr algn="ctr" indent="0" marL="0">
+              <a:buNone/>
+            </a:pPr>
+            <a:r>
+              <a:rPr lang="en-US" sz="1300" b="1" dirty="0">
+                <a:solidFill>
+                  <a:srgbClr val="0B5CAD"/>
+                </a:solidFill>
+                <a:latin typeface="Courier New" pitchFamily="34" charset="0"/>
+                <a:ea typeface="Courier New" pitchFamily="34" charset="-122"/>
+                <a:cs typeface="Courier New" pitchFamily="34" charset="-120"/>
+              </a:rPr>
+              <a:t>11-1</a:t>
+            </a:r>
+            <a:endParaRPr lang="en-US" sz="1300" dirty="0"/>
+          </a:p>
+        </p:txBody>
+      </p:sp>
+      <p:sp>
+        <p:nvSpPr>
+          <p:cNvPr id="7" name="Text 5"/>
+          <p:cNvSpPr/>
+          <p:nvPr/>
+        </p:nvSpPr>
+        <p:spPr>
+          <a:xfrm>
+            <a:off x="1783080" y="1673352"/>
+            <a:ext cx="9692640" cy="722376"/>
+          </a:xfrm>
+          <a:prstGeom prst="rect">
+            <a:avLst/>
+          </a:prstGeom>
+          <a:noFill/>
+          <a:ln/>
+        </p:spPr>
+        <p:txBody>
+          <a:bodyPr wrap="square" lIns="0" tIns="0" rIns="0" bIns="0" rtlCol="0" anchor="t"/>
+          <a:lstStyle/>
+          <a:p>
+            <a:pPr indent="0" marL="0">
+              <a:lnSpc>
+                <a:spcPts val="2100"/>
+              </a:lnSpc>
+              <a:buNone/>
+            </a:pPr>
+            <a:r>
+              <a:rPr lang="en-US" sz="1400" dirty="0">
+                <a:solidFill>
+                  <a:srgbClr val="16191D"/>
+                </a:solidFill>
+                <a:latin typeface="Yu Gothic" pitchFamily="34" charset="0"/>
+                <a:ea typeface="Yu Gothic" pitchFamily="34" charset="-122"/>
+                <a:cs typeface="Yu Gothic" pitchFamily="34" charset="-120"/>
+              </a:rPr>
+              <a:t>CSV ファイルで学生名簿を管理する場合の問題を4つ挙げ、それぞれ DBMS のどの機能が解決するか対応づけよ。</a:t>
+            </a:r>
+            <a:endParaRPr lang="en-US" sz="1400" dirty="0"/>
+          </a:p>
+        </p:txBody>
+      </p:sp>
+      <p:sp>
+        <p:nvSpPr>
+          <p:cNvPr id="8" name="Shape 6"/>
+          <p:cNvSpPr/>
+          <p:nvPr/>
+        </p:nvSpPr>
+        <p:spPr>
+          <a:xfrm>
+            <a:off x="685800" y="2560320"/>
+            <a:ext cx="868680" cy="402336"/>
+          </a:xfrm>
+          <a:prstGeom prst="roundRect">
+            <a:avLst>
+              <a:gd name="adj" fmla="val 18182"/>
+            </a:avLst>
+          </a:prstGeom>
+          <a:solidFill>
+            <a:srgbClr val="D9E6F4"/>
+          </a:solidFill>
+          <a:ln w="12700">
+            <a:solidFill>
+              <a:srgbClr val="0B5CAD"/>
+            </a:solidFill>
+            <a:prstDash val="solid"/>
+          </a:ln>
+        </p:spPr>
+      </p:sp>
+      <p:sp>
+        <p:nvSpPr>
+          <p:cNvPr id="9" name="Text 7"/>
+          <p:cNvSpPr/>
+          <p:nvPr/>
+        </p:nvSpPr>
+        <p:spPr>
+          <a:xfrm>
+            <a:off x="685800" y="2560320"/>
+            <a:ext cx="868680" cy="402336"/>
+          </a:xfrm>
+          <a:prstGeom prst="rect">
+            <a:avLst/>
+          </a:prstGeom>
+          <a:noFill/>
+          <a:ln/>
+        </p:spPr>
+        <p:txBody>
+          <a:bodyPr wrap="square" lIns="0" tIns="0" rIns="0" bIns="0" rtlCol="0" anchor="ctr"/>
+          <a:lstStyle/>
+          <a:p>
+            <a:pPr algn="ctr" indent="0" marL="0">
+              <a:buNone/>
+            </a:pPr>
+            <a:r>
+              <a:rPr lang="en-US" sz="1300" b="1" dirty="0">
+                <a:solidFill>
+                  <a:srgbClr val="0B5CAD"/>
+                </a:solidFill>
+                <a:latin typeface="Courier New" pitchFamily="34" charset="0"/>
+                <a:ea typeface="Courier New" pitchFamily="34" charset="-122"/>
+                <a:cs typeface="Courier New" pitchFamily="34" charset="-120"/>
+              </a:rPr>
+              <a:t>11-2</a:t>
+            </a:r>
+            <a:endParaRPr lang="en-US" sz="1300" dirty="0"/>
+          </a:p>
+        </p:txBody>
+      </p:sp>
+      <p:sp>
+        <p:nvSpPr>
+          <p:cNvPr id="10" name="Text 8"/>
+          <p:cNvSpPr/>
+          <p:nvPr/>
+        </p:nvSpPr>
+        <p:spPr>
+          <a:xfrm>
+            <a:off x="1783080" y="2542032"/>
+            <a:ext cx="9692640" cy="722376"/>
+          </a:xfrm>
+          <a:prstGeom prst="rect">
+            <a:avLst/>
+          </a:prstGeom>
+          <a:noFill/>
+          <a:ln/>
+        </p:spPr>
+        <p:txBody>
+          <a:bodyPr wrap="square" lIns="0" tIns="0" rIns="0" bIns="0" rtlCol="0" anchor="t"/>
+          <a:lstStyle/>
+          <a:p>
+            <a:pPr indent="0" marL="0">
+              <a:lnSpc>
+                <a:spcPts val="2100"/>
+              </a:lnSpc>
+              <a:buNone/>
+            </a:pPr>
+            <a:r>
+              <a:rPr lang="en-US" sz="1400" dirty="0">
+                <a:solidFill>
+                  <a:srgbClr val="16191D"/>
+                </a:solidFill>
+                <a:latin typeface="Yu Gothic" pitchFamily="34" charset="0"/>
+                <a:ea typeface="Yu Gothic" pitchFamily="34" charset="-122"/>
+                <a:cs typeface="Yu Gothic" pitchFamily="34" charset="-120"/>
+              </a:rPr>
+              <a:t>「注文番号・顧客名・顧客住所・商品名・単価・数量」からなる表について、更新異常・挿入異常・削除異常の例をそれぞれ挙げ、正規化した設計を示せ。</a:t>
+            </a:r>
+            <a:endParaRPr lang="en-US" sz="1400" dirty="0"/>
+          </a:p>
+        </p:txBody>
+      </p:sp>
+      <p:sp>
+        <p:nvSpPr>
+          <p:cNvPr id="11" name="Shape 9"/>
+          <p:cNvSpPr/>
+          <p:nvPr/>
+        </p:nvSpPr>
+        <p:spPr>
+          <a:xfrm>
+            <a:off x="685800" y="3429000"/>
+            <a:ext cx="868680" cy="402336"/>
+          </a:xfrm>
+          <a:prstGeom prst="roundRect">
+            <a:avLst>
+              <a:gd name="adj" fmla="val 18182"/>
+            </a:avLst>
+          </a:prstGeom>
+          <a:solidFill>
+            <a:srgbClr val="D9E6F4"/>
+          </a:solidFill>
+          <a:ln w="12700">
+            <a:solidFill>
+              <a:srgbClr val="0B5CAD"/>
+            </a:solidFill>
+            <a:prstDash val="solid"/>
+          </a:ln>
+        </p:spPr>
+      </p:sp>
+      <p:sp>
+        <p:nvSpPr>
+          <p:cNvPr id="12" name="Text 10"/>
+          <p:cNvSpPr/>
+          <p:nvPr/>
+        </p:nvSpPr>
+        <p:spPr>
+          <a:xfrm>
+            <a:off x="685800" y="3429000"/>
+            <a:ext cx="868680" cy="402336"/>
+          </a:xfrm>
+          <a:prstGeom prst="rect">
+            <a:avLst/>
+          </a:prstGeom>
+          <a:noFill/>
+          <a:ln/>
+        </p:spPr>
+        <p:txBody>
+          <a:bodyPr wrap="square" lIns="0" tIns="0" rIns="0" bIns="0" rtlCol="0" anchor="ctr"/>
+          <a:lstStyle/>
+          <a:p>
+            <a:pPr algn="ctr" indent="0" marL="0">
+              <a:buNone/>
+            </a:pPr>
+            <a:r>
+              <a:rPr lang="en-US" sz="1300" b="1" dirty="0">
+                <a:solidFill>
+                  <a:srgbClr val="0B5CAD"/>
+                </a:solidFill>
+                <a:latin typeface="Courier New" pitchFamily="34" charset="0"/>
+                <a:ea typeface="Courier New" pitchFamily="34" charset="-122"/>
+                <a:cs typeface="Courier New" pitchFamily="34" charset="-120"/>
+              </a:rPr>
+              <a:t>11-3</a:t>
+            </a:r>
+            <a:endParaRPr lang="en-US" sz="1300" dirty="0"/>
+          </a:p>
+        </p:txBody>
+      </p:sp>
+      <p:sp>
+        <p:nvSpPr>
+          <p:cNvPr id="13" name="Text 11"/>
+          <p:cNvSpPr/>
+          <p:nvPr/>
+        </p:nvSpPr>
+        <p:spPr>
+          <a:xfrm>
+            <a:off x="1783080" y="3410712"/>
+            <a:ext cx="9692640" cy="722376"/>
+          </a:xfrm>
+          <a:prstGeom prst="rect">
+            <a:avLst/>
+          </a:prstGeom>
+          <a:noFill/>
+          <a:ln/>
+        </p:spPr>
+        <p:txBody>
+          <a:bodyPr wrap="square" lIns="0" tIns="0" rIns="0" bIns="0" rtlCol="0" anchor="t"/>
+          <a:lstStyle/>
+          <a:p>
+            <a:pPr indent="0" marL="0">
+              <a:lnSpc>
+                <a:spcPts val="2100"/>
+              </a:lnSpc>
+              <a:buNone/>
+            </a:pPr>
+            <a:r>
+              <a:rPr lang="en-US" sz="1400" dirty="0">
+                <a:solidFill>
+                  <a:srgbClr val="16191D"/>
+                </a:solidFill>
+                <a:latin typeface="Yu Gothic" pitchFamily="34" charset="0"/>
+                <a:ea typeface="Yu Gothic" pitchFamily="34" charset="-122"/>
+                <a:cs typeface="Yu Gothic" pitchFamily="34" charset="-120"/>
+              </a:rPr>
+              <a:t>WHERE と HAVING の違いを説明し、両方を使う SQL の例を1つ書け。</a:t>
+            </a:r>
+            <a:endParaRPr lang="en-US" sz="1400" dirty="0"/>
+          </a:p>
+        </p:txBody>
+      </p:sp>
+      <p:sp>
+        <p:nvSpPr>
+          <p:cNvPr id="14" name="Shape 12"/>
+          <p:cNvSpPr/>
+          <p:nvPr/>
+        </p:nvSpPr>
+        <p:spPr>
+          <a:xfrm>
+            <a:off x="685800" y="4297680"/>
+            <a:ext cx="868680" cy="402336"/>
+          </a:xfrm>
+          <a:prstGeom prst="roundRect">
+            <a:avLst>
+              <a:gd name="adj" fmla="val 18182"/>
+            </a:avLst>
+          </a:prstGeom>
+          <a:solidFill>
+            <a:srgbClr val="D9E6F4"/>
+          </a:solidFill>
+          <a:ln w="12700">
+            <a:solidFill>
+              <a:srgbClr val="0B5CAD"/>
+            </a:solidFill>
+            <a:prstDash val="solid"/>
+          </a:ln>
+        </p:spPr>
+      </p:sp>
+      <p:sp>
+        <p:nvSpPr>
+          <p:cNvPr id="15" name="Text 13"/>
+          <p:cNvSpPr/>
+          <p:nvPr/>
+        </p:nvSpPr>
+        <p:spPr>
+          <a:xfrm>
+            <a:off x="685800" y="4297680"/>
+            <a:ext cx="868680" cy="402336"/>
+          </a:xfrm>
+          <a:prstGeom prst="rect">
+            <a:avLst/>
+          </a:prstGeom>
+          <a:noFill/>
+          <a:ln/>
+        </p:spPr>
+        <p:txBody>
+          <a:bodyPr wrap="square" lIns="0" tIns="0" rIns="0" bIns="0" rtlCol="0" anchor="ctr"/>
+          <a:lstStyle/>
+          <a:p>
+            <a:pPr algn="ctr" indent="0" marL="0">
+              <a:buNone/>
+            </a:pPr>
+            <a:r>
+              <a:rPr lang="en-US" sz="1300" b="1" dirty="0">
+                <a:solidFill>
+                  <a:srgbClr val="0B5CAD"/>
+                </a:solidFill>
+                <a:latin typeface="Courier New" pitchFamily="34" charset="0"/>
+                <a:ea typeface="Courier New" pitchFamily="34" charset="-122"/>
+                <a:cs typeface="Courier New" pitchFamily="34" charset="-120"/>
+              </a:rPr>
+              <a:t>11-4</a:t>
+            </a:r>
+            <a:endParaRPr lang="en-US" sz="1300" dirty="0"/>
+          </a:p>
+        </p:txBody>
+      </p:sp>
+      <p:sp>
+        <p:nvSpPr>
+          <p:cNvPr id="16" name="Text 14"/>
+          <p:cNvSpPr/>
+          <p:nvPr/>
+        </p:nvSpPr>
+        <p:spPr>
+          <a:xfrm>
+            <a:off x="1783080" y="4279392"/>
+            <a:ext cx="9692640" cy="722376"/>
+          </a:xfrm>
+          <a:prstGeom prst="rect">
+            <a:avLst/>
+          </a:prstGeom>
+          <a:noFill/>
+          <a:ln/>
+        </p:spPr>
+        <p:txBody>
+          <a:bodyPr wrap="square" lIns="0" tIns="0" rIns="0" bIns="0" rtlCol="0" anchor="t"/>
+          <a:lstStyle/>
+          <a:p>
+            <a:pPr indent="0" marL="0">
+              <a:lnSpc>
+                <a:spcPts val="2100"/>
+              </a:lnSpc>
+              <a:buNone/>
+            </a:pPr>
+            <a:r>
+              <a:rPr lang="en-US" sz="1400" dirty="0">
+                <a:solidFill>
+                  <a:srgbClr val="16191D"/>
+                </a:solidFill>
+                <a:latin typeface="Yu Gothic" pitchFamily="34" charset="0"/>
+                <a:ea typeface="Yu Gothic" pitchFamily="34" charset="-122"/>
+                <a:cs typeface="Yu Gothic" pitchFamily="34" charset="-120"/>
+              </a:rPr>
+              <a:t>「この文書と似た内容の文書を探せ」が WHERE や LIKE では書けないのはなぜか。ベクトル検索がそれをどう解くか説明せよ。</a:t>
+            </a:r>
+            <a:endParaRPr lang="en-US" sz="1400" dirty="0"/>
+          </a:p>
+        </p:txBody>
+      </p:sp>
+      <p:sp>
+        <p:nvSpPr>
+          <p:cNvPr id="17" name="Shape 15"/>
+          <p:cNvSpPr/>
+          <p:nvPr/>
+        </p:nvSpPr>
+        <p:spPr>
+          <a:xfrm>
+            <a:off x="685800" y="5166360"/>
+            <a:ext cx="868680" cy="402336"/>
+          </a:xfrm>
+          <a:prstGeom prst="roundRect">
+            <a:avLst>
+              <a:gd name="adj" fmla="val 18182"/>
+            </a:avLst>
+          </a:prstGeom>
+          <a:solidFill>
+            <a:srgbClr val="D9E6F4"/>
+          </a:solidFill>
+          <a:ln w="12700">
+            <a:solidFill>
+              <a:srgbClr val="0B5CAD"/>
+            </a:solidFill>
+            <a:prstDash val="solid"/>
+          </a:ln>
+        </p:spPr>
+      </p:sp>
+      <p:sp>
+        <p:nvSpPr>
+          <p:cNvPr id="18" name="Text 16"/>
+          <p:cNvSpPr/>
+          <p:nvPr/>
+        </p:nvSpPr>
+        <p:spPr>
+          <a:xfrm>
+            <a:off x="685800" y="5166360"/>
+            <a:ext cx="868680" cy="402336"/>
+          </a:xfrm>
+          <a:prstGeom prst="rect">
+            <a:avLst/>
+          </a:prstGeom>
+          <a:noFill/>
+          <a:ln/>
+        </p:spPr>
+        <p:txBody>
+          <a:bodyPr wrap="square" lIns="0" tIns="0" rIns="0" bIns="0" rtlCol="0" anchor="ctr"/>
+          <a:lstStyle/>
+          <a:p>
+            <a:pPr algn="ctr" indent="0" marL="0">
+              <a:buNone/>
+            </a:pPr>
+            <a:r>
+              <a:rPr lang="en-US" sz="1300" b="1" dirty="0">
+                <a:solidFill>
+                  <a:srgbClr val="0B5CAD"/>
+                </a:solidFill>
+                <a:latin typeface="Courier New" pitchFamily="34" charset="0"/>
+                <a:ea typeface="Courier New" pitchFamily="34" charset="-122"/>
+                <a:cs typeface="Courier New" pitchFamily="34" charset="-120"/>
+              </a:rPr>
+              <a:t>11-5</a:t>
+            </a:r>
+            <a:endParaRPr lang="en-US" sz="1300" dirty="0"/>
+          </a:p>
+        </p:txBody>
+      </p:sp>
+      <p:sp>
+        <p:nvSpPr>
+          <p:cNvPr id="19" name="Text 17"/>
+          <p:cNvSpPr/>
+          <p:nvPr/>
+        </p:nvSpPr>
+        <p:spPr>
+          <a:xfrm>
+            <a:off x="1783080" y="5148072"/>
+            <a:ext cx="9692640" cy="722376"/>
+          </a:xfrm>
+          <a:prstGeom prst="rect">
+            <a:avLst/>
+          </a:prstGeom>
+          <a:noFill/>
+          <a:ln/>
+        </p:spPr>
+        <p:txBody>
+          <a:bodyPr wrap="square" lIns="0" tIns="0" rIns="0" bIns="0" rtlCol="0" anchor="t"/>
+          <a:lstStyle/>
+          <a:p>
+            <a:pPr indent="0" marL="0">
+              <a:lnSpc>
+                <a:spcPts val="2100"/>
+              </a:lnSpc>
+              <a:buNone/>
+            </a:pPr>
+            <a:r>
+              <a:rPr lang="en-US" sz="1400" dirty="0">
+                <a:solidFill>
+                  <a:srgbClr val="16191D"/>
+                </a:solidFill>
+                <a:latin typeface="Yu Gothic" pitchFamily="34" charset="0"/>
+                <a:ea typeface="Yu Gothic" pitchFamily="34" charset="-122"/>
+                <a:cs typeface="Yu Gothic" pitchFamily="34" charset="-120"/>
+              </a:rPr>
+              <a:t>CAP 定理において分断耐性を諦められないのはなぜか。また (a) 銀行の残高照会 (b) SNS の「いいね」の数 (c) 航空券の座席予約 は C と A のどちらを優先すべきか。</a:t>
+            </a:r>
+            <a:endParaRPr lang="en-US" sz="1400" dirty="0"/>
+          </a:p>
+        </p:txBody>
+      </p:sp>
+    </p:spTree>
+  </p:cSld>
+  <p:clrMapOvr>
+    <a:masterClrMapping/>
+  </p:clrMapOvr>
+</p:sld>
+</file>
+
+<file path=ppt/slides/slide28.xml><?xml version="1.0" encoding="utf-8"?>
+<p:sld xmlns:a="http://schemas.openxmlformats.org/drawingml/2006/main" xmlns:r="http://schemas.openxmlformats.org/officeDocument/2006/relationships" xmlns:p="http://schemas.openxmlformats.org/presentationml/2006/main">
+  <p:cSld name="Slide 28">
     <p:bg>
       <p:bgPr>
         <a:solidFill>
@@ -17289,7 +18888,7 @@
         <p:spPr>
           <a:xfrm>
             <a:off x="4297680" y="1380744"/>
-            <a:ext cx="7132320" cy="640080"/>
+            <a:ext cx="7132320" cy="548640"/>
           </a:xfrm>
           <a:prstGeom prst="rect">
             <a:avLst/>
@@ -17330,7 +18929,7 @@
         </p:nvSpPr>
         <p:spPr>
           <a:xfrm>
-            <a:off x="822960" y="2167128"/>
+            <a:off x="822960" y="2075688"/>
             <a:ext cx="3291840" cy="320040"/>
           </a:xfrm>
           <a:prstGeom prst="rect">
@@ -17369,8 +18968,8 @@
         </p:nvSpPr>
         <p:spPr>
           <a:xfrm>
-            <a:off x="4297680" y="2130552"/>
-            <a:ext cx="7132320" cy="640080"/>
+            <a:off x="4297680" y="2039112"/>
+            <a:ext cx="7132320" cy="548640"/>
           </a:xfrm>
           <a:prstGeom prst="rect">
             <a:avLst/>
@@ -17411,7 +19010,7 @@
         </p:nvSpPr>
         <p:spPr>
           <a:xfrm>
-            <a:off x="822960" y="2916936"/>
+            <a:off x="822960" y="2734056"/>
             <a:ext cx="3291840" cy="320040"/>
           </a:xfrm>
           <a:prstGeom prst="rect">
@@ -17450,8 +19049,8 @@
         </p:nvSpPr>
         <p:spPr>
           <a:xfrm>
-            <a:off x="4297680" y="2880360"/>
-            <a:ext cx="7132320" cy="640080"/>
+            <a:off x="4297680" y="2697480"/>
+            <a:ext cx="7132320" cy="548640"/>
           </a:xfrm>
           <a:prstGeom prst="rect">
             <a:avLst/>
@@ -17492,7 +19091,7 @@
         </p:nvSpPr>
         <p:spPr>
           <a:xfrm>
-            <a:off x="822960" y="3666744"/>
+            <a:off x="822960" y="3392424"/>
             <a:ext cx="3291840" cy="320040"/>
           </a:xfrm>
           <a:prstGeom prst="rect">
@@ -17531,8 +19130,8 @@
         </p:nvSpPr>
         <p:spPr>
           <a:xfrm>
-            <a:off x="4297680" y="3630168"/>
-            <a:ext cx="7132320" cy="640080"/>
+            <a:off x="4297680" y="3355848"/>
+            <a:ext cx="7132320" cy="548640"/>
           </a:xfrm>
           <a:prstGeom prst="rect">
             <a:avLst/>
@@ -17573,7 +19172,7 @@
         </p:nvSpPr>
         <p:spPr>
           <a:xfrm>
-            <a:off x="822960" y="4416552"/>
+            <a:off x="822960" y="4050792"/>
             <a:ext cx="3291840" cy="320040"/>
           </a:xfrm>
           <a:prstGeom prst="rect">
@@ -17612,8 +19211,8 @@
         </p:nvSpPr>
         <p:spPr>
           <a:xfrm>
-            <a:off x="4297680" y="4379976"/>
-            <a:ext cx="7132320" cy="640080"/>
+            <a:off x="4297680" y="4014216"/>
+            <a:ext cx="7132320" cy="548640"/>
           </a:xfrm>
           <a:prstGeom prst="rect">
             <a:avLst/>
@@ -17654,7 +19253,7 @@
         </p:nvSpPr>
         <p:spPr>
           <a:xfrm>
-            <a:off x="822960" y="5166360"/>
+            <a:off x="822960" y="4709160"/>
             <a:ext cx="3291840" cy="320040"/>
           </a:xfrm>
           <a:prstGeom prst="rect">
@@ -17693,8 +19292,8 @@
         </p:nvSpPr>
         <p:spPr>
           <a:xfrm>
-            <a:off x="4297680" y="5129784"/>
-            <a:ext cx="7132320" cy="640080"/>
+            <a:off x="4297680" y="4672584"/>
+            <a:ext cx="7132320" cy="548640"/>
           </a:xfrm>
           <a:prstGeom prst="rect">
             <a:avLst/>
@@ -17730,6 +19329,87 @@
       <p:sp>
         <p:nvSpPr>
           <p:cNvPr id="15" name="Text 13"/>
+          <p:cNvSpPr/>
+          <p:nvPr/>
+        </p:nvSpPr>
+        <p:spPr>
+          <a:xfrm>
+            <a:off x="822960" y="5367528"/>
+            <a:ext cx="3291840" cy="320040"/>
+          </a:xfrm>
+          <a:prstGeom prst="rect">
+            <a:avLst/>
+          </a:prstGeom>
+          <a:noFill/>
+          <a:ln/>
+        </p:spPr>
+        <p:txBody>
+          <a:bodyPr wrap="square" lIns="0" tIns="0" rIns="0" bIns="0" rtlCol="0" anchor="ctr"/>
+          <a:lstStyle/>
+          <a:p>
+            <a:pPr indent="0" marL="0">
+              <a:buNone/>
+            </a:pPr>
+            <a:r>
+              <a:rPr lang="en-US" sz="1400" b="1" dirty="0">
+                <a:solidFill>
+                  <a:srgbClr val="6AB0F3"/>
+                </a:solidFill>
+                <a:latin typeface="Yu Gothic" pitchFamily="34" charset="0"/>
+                <a:ea typeface="Yu Gothic" pitchFamily="34" charset="-122"/>
+                <a:cs typeface="Yu Gothic" pitchFamily="34" charset="-120"/>
+              </a:rPr>
+              <a:t>ベクトル検索</a:t>
+            </a:r>
+            <a:endParaRPr lang="en-US" sz="1400" dirty="0"/>
+          </a:p>
+        </p:txBody>
+      </p:sp>
+      <p:sp>
+        <p:nvSpPr>
+          <p:cNvPr id="16" name="Text 14"/>
+          <p:cNvSpPr/>
+          <p:nvPr/>
+        </p:nvSpPr>
+        <p:spPr>
+          <a:xfrm>
+            <a:off x="4297680" y="5330952"/>
+            <a:ext cx="7132320" cy="548640"/>
+          </a:xfrm>
+          <a:prstGeom prst="rect">
+            <a:avLst/>
+          </a:prstGeom>
+          <a:noFill/>
+          <a:ln/>
+        </p:spPr>
+        <p:txBody>
+          <a:bodyPr wrap="square" lIns="0" tIns="0" rIns="0" bIns="0" rtlCol="0" anchor="t"/>
+          <a:lstStyle/>
+          <a:p>
+            <a:pPr indent="0" marL="0">
+              <a:lnSpc>
+                <a:spcPts val="1900"/>
+              </a:lnSpc>
+              <a:buNone/>
+            </a:pPr>
+            <a:r>
+              <a:rPr lang="en-US" sz="1250" dirty="0">
+                <a:solidFill>
+                  <a:srgbClr val="E8EBEF"/>
+                </a:solidFill>
+                <a:latin typeface="Yu Gothic" pitchFamily="34" charset="0"/>
+                <a:ea typeface="Yu Gothic" pitchFamily="34" charset="-122"/>
+                <a:cs typeface="Yu Gothic" pitchFamily="34" charset="-120"/>
+              </a:rPr>
+              <a:t>値の一致ではなく意味の近さで探す。第13回の RAG はこの上に立つ</a:t>
+            </a:r>
+            <a:endParaRPr lang="en-US" sz="1250" dirty="0"/>
+          </a:p>
+        </p:txBody>
+      </p:sp>
+      <p:sp>
+        <p:nvSpPr>
+          <p:cNvPr id="17" name="Text 15"/>
           <p:cNvSpPr/>
           <p:nvPr/>
         </p:nvSpPr>
@@ -18004,7 +19684,7 @@
               <a:buNone/>
             </a:pPr>
             <a:r>
-              <a:rPr lang="en-US" sz="1600" b="1" dirty="0">
+              <a:rPr lang="en-US" sz="1500" b="1" dirty="0">
                 <a:solidFill>
                   <a:srgbClr val="16191D"/>
                 </a:solidFill>
@@ -18018,7 +19698,7 @@
               <a:buNone/>
             </a:pPr>
             <a:r>
-              <a:rPr lang="en-US" sz="1400" dirty="0">
+              <a:rPr lang="en-US" sz="1300" dirty="0">
                 <a:solidFill>
                   <a:srgbClr val="5F6672"/>
                 </a:solidFill>
@@ -18028,7 +19708,7 @@
               </a:rPr>
               <a:t>　と比べたデータベースの利点を説明できる</a:t>
             </a:r>
-            <a:endParaRPr lang="en-US" sz="1600" dirty="0"/>
+            <a:endParaRPr lang="en-US" sz="1500" dirty="0"/>
           </a:p>
         </p:txBody>
       </p:sp>
@@ -18040,7 +19720,7 @@
         </p:nvSpPr>
         <p:spPr>
           <a:xfrm>
-            <a:off x="777240" y="2624328"/>
+            <a:off x="777240" y="2496312"/>
             <a:ext cx="457200" cy="457200"/>
           </a:xfrm>
           <a:prstGeom prst="ellipse">
@@ -18065,7 +19745,7 @@
         </p:nvSpPr>
         <p:spPr>
           <a:xfrm>
-            <a:off x="777240" y="2624328"/>
+            <a:off x="777240" y="2496312"/>
             <a:ext cx="457200" cy="457200"/>
           </a:xfrm>
           <a:prstGeom prst="rect">
@@ -18104,7 +19784,7 @@
         </p:nvSpPr>
         <p:spPr>
           <a:xfrm>
-            <a:off x="1417320" y="2642616"/>
+            <a:off x="1417320" y="2514600"/>
             <a:ext cx="9966960" cy="457200"/>
           </a:xfrm>
           <a:prstGeom prst="rect">
@@ -18121,7 +19801,7 @@
               <a:buNone/>
             </a:pPr>
             <a:r>
-              <a:rPr lang="en-US" sz="1600" b="1" dirty="0">
+              <a:rPr lang="en-US" sz="1500" b="1" dirty="0">
                 <a:solidFill>
                   <a:srgbClr val="16191D"/>
                 </a:solidFill>
@@ -18135,7 +19815,7 @@
               <a:buNone/>
             </a:pPr>
             <a:r>
-              <a:rPr lang="en-US" sz="1400" dirty="0">
+              <a:rPr lang="en-US" sz="1300" dirty="0">
                 <a:solidFill>
                   <a:srgbClr val="5F6672"/>
                 </a:solidFill>
@@ -18145,7 +19825,7 @@
               </a:rPr>
               <a:t>　の用語を使い、正規化の必要性を説明できる</a:t>
             </a:r>
-            <a:endParaRPr lang="en-US" sz="1600" dirty="0"/>
+            <a:endParaRPr lang="en-US" sz="1500" dirty="0"/>
           </a:p>
         </p:txBody>
       </p:sp>
@@ -18157,7 +19837,7 @@
         </p:nvSpPr>
         <p:spPr>
           <a:xfrm>
-            <a:off x="777240" y="3483864"/>
+            <a:off x="777240" y="3227832"/>
             <a:ext cx="457200" cy="457200"/>
           </a:xfrm>
           <a:prstGeom prst="ellipse">
@@ -18182,7 +19862,7 @@
         </p:nvSpPr>
         <p:spPr>
           <a:xfrm>
-            <a:off x="777240" y="3483864"/>
+            <a:off x="777240" y="3227832"/>
             <a:ext cx="457200" cy="457200"/>
           </a:xfrm>
           <a:prstGeom prst="rect">
@@ -18221,7 +19901,7 @@
         </p:nvSpPr>
         <p:spPr>
           <a:xfrm>
-            <a:off x="1417320" y="3502152"/>
+            <a:off x="1417320" y="3246120"/>
             <a:ext cx="9966960" cy="457200"/>
           </a:xfrm>
           <a:prstGeom prst="rect">
@@ -18238,7 +19918,7 @@
               <a:buNone/>
             </a:pPr>
             <a:r>
-              <a:rPr lang="en-US" sz="1600" b="1" dirty="0">
+              <a:rPr lang="en-US" sz="1500" b="1" dirty="0">
                 <a:solidFill>
                   <a:srgbClr val="16191D"/>
                 </a:solidFill>
@@ -18252,7 +19932,7 @@
               <a:buNone/>
             </a:pPr>
             <a:r>
-              <a:rPr lang="en-US" sz="1400" dirty="0">
+              <a:rPr lang="en-US" sz="1300" dirty="0">
                 <a:solidFill>
                   <a:srgbClr val="5F6672"/>
                 </a:solidFill>
@@ -18262,7 +19942,7 @@
               </a:rPr>
               <a:t>　の基本的な問い合わせを読み書きできる</a:t>
             </a:r>
-            <a:endParaRPr lang="en-US" sz="1600" dirty="0"/>
+            <a:endParaRPr lang="en-US" sz="1500" dirty="0"/>
           </a:p>
         </p:txBody>
       </p:sp>
@@ -18274,7 +19954,7 @@
         </p:nvSpPr>
         <p:spPr>
           <a:xfrm>
-            <a:off x="777240" y="4343400"/>
+            <a:off x="777240" y="3959352"/>
             <a:ext cx="457200" cy="457200"/>
           </a:xfrm>
           <a:prstGeom prst="ellipse">
@@ -18299,7 +19979,7 @@
         </p:nvSpPr>
         <p:spPr>
           <a:xfrm>
-            <a:off x="777240" y="4343400"/>
+            <a:off x="777240" y="3959352"/>
             <a:ext cx="457200" cy="457200"/>
           </a:xfrm>
           <a:prstGeom prst="rect">
@@ -18338,7 +20018,7 @@
         </p:nvSpPr>
         <p:spPr>
           <a:xfrm>
-            <a:off x="1417320" y="4361688"/>
+            <a:off x="1417320" y="3977640"/>
             <a:ext cx="9966960" cy="457200"/>
           </a:xfrm>
           <a:prstGeom prst="rect">
@@ -18355,7 +20035,7 @@
               <a:buNone/>
             </a:pPr>
             <a:r>
-              <a:rPr lang="en-US" sz="1600" b="1" dirty="0">
+              <a:rPr lang="en-US" sz="1500" b="1" dirty="0">
                 <a:solidFill>
                   <a:srgbClr val="16191D"/>
                 </a:solidFill>
@@ -18369,7 +20049,7 @@
               <a:buNone/>
             </a:pPr>
             <a:r>
-              <a:rPr lang="en-US" sz="1400" dirty="0">
+              <a:rPr lang="en-US" sz="1300" dirty="0">
                 <a:solidFill>
                   <a:srgbClr val="5F6672"/>
                 </a:solidFill>
@@ -18379,7 +20059,7 @@
               </a:rPr>
               <a:t>　を説明し、それぞれが何を防ぐか述べられる</a:t>
             </a:r>
-            <a:endParaRPr lang="en-US" sz="1600" dirty="0"/>
+            <a:endParaRPr lang="en-US" sz="1500" dirty="0"/>
           </a:p>
         </p:txBody>
       </p:sp>
@@ -18391,7 +20071,7 @@
         </p:nvSpPr>
         <p:spPr>
           <a:xfrm>
-            <a:off x="777240" y="5202936"/>
+            <a:off x="777240" y="4690872"/>
             <a:ext cx="457200" cy="457200"/>
           </a:xfrm>
           <a:prstGeom prst="ellipse">
@@ -18416,7 +20096,7 @@
         </p:nvSpPr>
         <p:spPr>
           <a:xfrm>
-            <a:off x="777240" y="5202936"/>
+            <a:off x="777240" y="4690872"/>
             <a:ext cx="457200" cy="457200"/>
           </a:xfrm>
           <a:prstGeom prst="rect">
@@ -18455,7 +20135,7 @@
         </p:nvSpPr>
         <p:spPr>
           <a:xfrm>
-            <a:off x="1417320" y="5221224"/>
+            <a:off x="1417320" y="4709160"/>
             <a:ext cx="9966960" cy="457200"/>
           </a:xfrm>
           <a:prstGeom prst="rect">
@@ -18472,7 +20152,7 @@
               <a:buNone/>
             </a:pPr>
             <a:r>
-              <a:rPr lang="en-US" sz="1600" b="1" dirty="0">
+              <a:rPr lang="en-US" sz="1500" b="1" dirty="0">
                 <a:solidFill>
                   <a:srgbClr val="16191D"/>
                 </a:solidFill>
@@ -18486,7 +20166,7 @@
               <a:buNone/>
             </a:pPr>
             <a:r>
-              <a:rPr lang="en-US" sz="1400" dirty="0">
+              <a:rPr lang="en-US" sz="1300" dirty="0">
                 <a:solidFill>
                   <a:srgbClr val="5F6672"/>
                 </a:solidFill>
@@ -18496,7 +20176,124 @@
               </a:rPr>
               <a:t>　の意味を説明できる</a:t>
             </a:r>
-            <a:endParaRPr lang="en-US" sz="1600" dirty="0"/>
+            <a:endParaRPr lang="en-US" sz="1500" dirty="0"/>
+          </a:p>
+        </p:txBody>
+      </p:sp>
+      <p:sp>
+        <p:nvSpPr>
+          <p:cNvPr id="20" name="Shape 18"/>
+          <p:cNvSpPr/>
+          <p:nvPr/>
+        </p:nvSpPr>
+        <p:spPr>
+          <a:xfrm>
+            <a:off x="777240" y="5422392"/>
+            <a:ext cx="457200" cy="457200"/>
+          </a:xfrm>
+          <a:prstGeom prst="ellipse">
+            <a:avLst/>
+          </a:prstGeom>
+          <a:solidFill>
+            <a:srgbClr val="D9E6F4"/>
+          </a:solidFill>
+          <a:ln w="15240">
+            <a:solidFill>
+              <a:srgbClr val="0B5CAD"/>
+            </a:solidFill>
+            <a:prstDash val="solid"/>
+          </a:ln>
+        </p:spPr>
+      </p:sp>
+      <p:sp>
+        <p:nvSpPr>
+          <p:cNvPr id="21" name="Text 19"/>
+          <p:cNvSpPr/>
+          <p:nvPr/>
+        </p:nvSpPr>
+        <p:spPr>
+          <a:xfrm>
+            <a:off x="777240" y="5422392"/>
+            <a:ext cx="457200" cy="457200"/>
+          </a:xfrm>
+          <a:prstGeom prst="rect">
+            <a:avLst/>
+          </a:prstGeom>
+          <a:noFill/>
+          <a:ln/>
+        </p:spPr>
+        <p:txBody>
+          <a:bodyPr wrap="square" lIns="0" tIns="0" rIns="0" bIns="0" rtlCol="0" anchor="ctr"/>
+          <a:lstStyle/>
+          <a:p>
+            <a:pPr algn="ctr" indent="0" marL="0">
+              <a:buNone/>
+            </a:pPr>
+            <a:r>
+              <a:rPr lang="en-US" sz="1400" b="1" dirty="0">
+                <a:solidFill>
+                  <a:srgbClr val="0B5CAD"/>
+                </a:solidFill>
+                <a:latin typeface="Yu Gothic" pitchFamily="34" charset="0"/>
+                <a:ea typeface="Yu Gothic" pitchFamily="34" charset="-122"/>
+                <a:cs typeface="Yu Gothic" pitchFamily="34" charset="-120"/>
+              </a:rPr>
+              <a:t>6</a:t>
+            </a:r>
+            <a:endParaRPr lang="en-US" sz="1400" dirty="0"/>
+          </a:p>
+        </p:txBody>
+      </p:sp>
+      <p:sp>
+        <p:nvSpPr>
+          <p:cNvPr id="22" name="Text 20"/>
+          <p:cNvSpPr/>
+          <p:nvPr/>
+        </p:nvSpPr>
+        <p:spPr>
+          <a:xfrm>
+            <a:off x="1417320" y="5440680"/>
+            <a:ext cx="9966960" cy="457200"/>
+          </a:xfrm>
+          <a:prstGeom prst="rect">
+            <a:avLst/>
+          </a:prstGeom>
+          <a:noFill/>
+          <a:ln/>
+        </p:spPr>
+        <p:txBody>
+          <a:bodyPr wrap="square" lIns="0" tIns="0" rIns="0" bIns="0" rtlCol="0" anchor="ctr"/>
+          <a:lstStyle/>
+          <a:p>
+            <a:pPr indent="0" marL="0">
+              <a:buNone/>
+            </a:pPr>
+            <a:r>
+              <a:rPr lang="en-US" sz="1500" b="1" dirty="0">
+                <a:solidFill>
+                  <a:srgbClr val="16191D"/>
+                </a:solidFill>
+                <a:latin typeface="Yu Gothic" pitchFamily="34" charset="0"/>
+                <a:ea typeface="Yu Gothic" pitchFamily="34" charset="-122"/>
+                <a:cs typeface="Yu Gothic" pitchFamily="34" charset="-120"/>
+              </a:rPr>
+              <a:t>ベクトル検索</a:t>
+            </a:r>
+            <a:pPr indent="0" marL="0">
+              <a:buNone/>
+            </a:pPr>
+            <a:r>
+              <a:rPr lang="en-US" sz="1300" dirty="0">
+                <a:solidFill>
+                  <a:srgbClr val="5F6672"/>
+                </a:solidFill>
+                <a:latin typeface="Yu Gothic" pitchFamily="34" charset="0"/>
+                <a:ea typeface="Yu Gothic" pitchFamily="34" charset="-122"/>
+                <a:cs typeface="Yu Gothic" pitchFamily="34" charset="-120"/>
+              </a:rPr>
+              <a:t>　が何を検索しているか説明し、RAG との関係を述べられる</a:t>
+            </a:r>
+            <a:endParaRPr lang="en-US" sz="1500" dirty="0"/>
           </a:p>
         </p:txBody>
       </p:sp>

--- a/slides/第11回_データベースとデータ処理.pptx
+++ b/slides/第11回_データベースとデータ処理.pptx
@@ -18439,7 +18439,7 @@
                 <a:ea typeface="Yu Gothic" pitchFamily="34" charset="-122"/>
                 <a:cs typeface="Yu Gothic" pitchFamily="34" charset="-120"/>
               </a:rPr>
-              <a:t>「注文番号・顧客名・顧客住所・商品名・単価・数量」からなる表について、更新異常・挿入異常・削除異常の例をそれぞれ挙げ、正規化した設計を示せ。</a:t>
+              <a:t>注文の表（主キーは 注文番号＋商品名。データは講義ノート参照）について、更新異常・挿入異常・削除異常の例を1つずつ挙げよ。また第3正規形に分割し、各表の主キーと外部キーを示せ。</a:t>
             </a:r>
             <a:endParaRPr lang="en-US" sz="1400" dirty="0"/>
           </a:p>
@@ -18505,7 +18505,7 @@
                 <a:ea typeface="Courier New" pitchFamily="34" charset="-122"/>
                 <a:cs typeface="Courier New" pitchFamily="34" charset="-120"/>
               </a:rPr>
-              <a:t>11-3</a:t>
+              <a:t>11-4</a:t>
             </a:r>
             <a:endParaRPr lang="en-US" sz="1300" dirty="0"/>
           </a:p>
@@ -18613,7 +18613,7 @@
                 <a:ea typeface="Courier New" pitchFamily="34" charset="-122"/>
                 <a:cs typeface="Courier New" pitchFamily="34" charset="-120"/>
               </a:rPr>
-              <a:t>11-4</a:t>
+              <a:t>11-7</a:t>
             </a:r>
             <a:endParaRPr lang="en-US" sz="1300" dirty="0"/>
           </a:p>
@@ -18721,7 +18721,7 @@
                 <a:ea typeface="Courier New" pitchFamily="34" charset="-122"/>
                 <a:cs typeface="Courier New" pitchFamily="34" charset="-120"/>
               </a:rPr>
-              <a:t>11-5</a:t>
+              <a:t>11-8</a:t>
             </a:r>
             <a:endParaRPr lang="en-US" sz="1300" dirty="0"/>
           </a:p>
